--- a/Airflow_vs_Dagster_Thuyet_Trinh.pptx
+++ b/Airflow_vs_Dagster_Thuyet_Trinh.pptx
@@ -862,7 +862,7 @@
           <a:lstStyle/>
           <a:p>
             <a:r>
-              <a:t>Speaker Note: Phân tích sự khác biệt sâu sắc giữa 2 sơ đồ: Airflow quản lý chuỗi task hình chữ nhật và phải tự viết nhánh rẽ; Dagster quản lý chuỗi tài sản dữ liệu sống đi kèm các chiếc khiên kiểm định Asset Checks bảo vệ chất lượng dữ liệu.</a:t>
+              <a:t>Speaker Note: Phân tích sự khác biệt sâu sắc giữa 2 sơ đồ: Airflow quản lý chuỗi task hình chữ nhật và phải tự viết 2 lần @task.branch + TriggerRule khi gom nhánh; Dagster quản lý chuỗi tài sản dữ liệu sống đi kèm các chiếc khiên kiểm định Asset Checks độc lập, tự động ngắt cầu dao (blocking=True) bảo vệ sổ cái ERP.</a:t>
             </a:r>
           </a:p>
         </p:txBody>
@@ -7670,1808 +7670,30 @@
           </a:p>
         </p:txBody>
       </p:sp>
-      <p:sp>
-        <p:nvSpPr>
-          <p:cNvPr id="5" name="Rounded Rectangle 4"/>
-          <p:cNvSpPr/>
+      <p:pic>
+        <p:nvPicPr>
+          <p:cNvPr id="5" name="Picture 4" descr="mermaid_diagram_4k.png"/>
+          <p:cNvPicPr>
+            <a:picLocks noChangeAspect="1"/>
+          </p:cNvPicPr>
           <p:nvPr/>
-        </p:nvSpPr>
-        <p:spPr>
-          <a:xfrm>
-            <a:off x="731520" y="1536192"/>
-            <a:ext cx="5166360" cy="4846320"/>
-          </a:xfrm>
-          <a:prstGeom prst="roundRect">
-            <a:avLst/>
-          </a:prstGeom>
-          <a:solidFill>
-            <a:srgbClr val="120E20"/>
-          </a:solidFill>
-          <a:ln w="19050">
-            <a:solidFill>
-              <a:srgbClr val="38BDF8"/>
-            </a:solidFill>
-          </a:ln>
-        </p:spPr>
-        <p:style>
-          <a:lnRef idx="1">
-            <a:schemeClr val="accent1"/>
-          </a:lnRef>
-          <a:fillRef idx="3">
-            <a:schemeClr val="accent1"/>
-          </a:fillRef>
-          <a:effectRef idx="2">
-            <a:schemeClr val="accent1"/>
-          </a:effectRef>
-          <a:fontRef idx="minor">
-            <a:schemeClr val="lt1"/>
-          </a:fontRef>
-        </p:style>
-        <p:txBody>
-          <a:bodyPr rtlCol="0" anchor="ctr"/>
-          <a:lstStyle/>
-          <a:p>
-            <a:pPr algn="ctr"/>
-          </a:p>
-        </p:txBody>
-      </p:sp>
-      <p:sp>
-        <p:nvSpPr>
-          <p:cNvPr id="6" name="Rounded Rectangle 5"/>
-          <p:cNvSpPr/>
-          <p:nvPr/>
-        </p:nvSpPr>
-        <p:spPr>
-          <a:xfrm>
-            <a:off x="841248" y="1609344"/>
-            <a:ext cx="4946904" cy="292608"/>
-          </a:xfrm>
-          <a:prstGeom prst="roundRect">
-            <a:avLst/>
-          </a:prstGeom>
-          <a:solidFill>
-            <a:srgbClr val="0C1C30"/>
-          </a:solidFill>
-          <a:ln w="12700">
-            <a:solidFill>
-              <a:srgbClr val="38BDF8"/>
-            </a:solidFill>
-          </a:ln>
-        </p:spPr>
-        <p:style>
-          <a:lnRef idx="1">
-            <a:schemeClr val="accent1"/>
-          </a:lnRef>
-          <a:fillRef idx="3">
-            <a:schemeClr val="accent1"/>
-          </a:fillRef>
-          <a:effectRef idx="2">
-            <a:schemeClr val="accent1"/>
-          </a:effectRef>
-          <a:fontRef idx="minor">
-            <a:schemeClr val="lt1"/>
-          </a:fontRef>
-        </p:style>
-        <p:txBody>
-          <a:bodyPr rtlCol="0" anchor="ctr"/>
-          <a:lstStyle/>
-          <a:p>
-            <a:pPr algn="ctr">
-              <a:defRPr sz="950" b="1">
-                <a:solidFill>
-                  <a:srgbClr val="38BDF8"/>
-                </a:solidFill>
-                <a:latin typeface="Arial"/>
-              </a:defRPr>
-            </a:pPr>
-            <a:r>
-              <a:t>⚙️ GÓC NHÌN AIRFLOW (Task-Centric)  |  Làm gì tiếp? • Mù dữ liệu • XCom qua DB</a:t>
-            </a:r>
-          </a:p>
-        </p:txBody>
-      </p:sp>
-      <p:sp>
-        <p:nvSpPr>
-          <p:cNvPr id="7" name="Rounded Rectangle 6"/>
-          <p:cNvSpPr/>
-          <p:nvPr/>
-        </p:nvSpPr>
-        <p:spPr>
-          <a:xfrm>
-            <a:off x="1165860" y="1975104"/>
-            <a:ext cx="4297680" cy="384048"/>
-          </a:xfrm>
-          <a:prstGeom prst="roundRect">
-            <a:avLst/>
-          </a:prstGeom>
-          <a:solidFill>
-            <a:srgbClr val="0F172A"/>
-          </a:solidFill>
-          <a:ln w="15240">
-            <a:solidFill>
-              <a:srgbClr val="38BDF8"/>
-            </a:solidFill>
-          </a:ln>
-        </p:spPr>
-        <p:style>
-          <a:lnRef idx="1">
-            <a:schemeClr val="accent1"/>
-          </a:lnRef>
-          <a:fillRef idx="3">
-            <a:schemeClr val="accent1"/>
-          </a:fillRef>
-          <a:effectRef idx="2">
-            <a:schemeClr val="accent1"/>
-          </a:effectRef>
-          <a:fontRef idx="minor">
-            <a:schemeClr val="lt1"/>
-          </a:fontRef>
-        </p:style>
-        <p:txBody>
-          <a:bodyPr rtlCol="0" anchor="ctr" wrap="square" lIns="73152" rIns="73152" tIns="36576" bIns="36576"/>
-          <a:lstStyle/>
-          <a:p>
-            <a:pPr algn="ctr">
-              <a:defRPr sz="1000" b="1">
-                <a:solidFill>
-                  <a:srgbClr val="F8FAFC"/>
-                </a:solidFill>
-                <a:latin typeface="Arial"/>
-              </a:defRPr>
-            </a:pPr>
-            <a:r>
-              <a:t>📄 ingest_multipage_invoice_pdf</a:t>
-            </a:r>
-          </a:p>
-          <a:p>
-            <a:pPr algn="ctr">
-              <a:spcBef>
-                <a:spcPts val="200"/>
-              </a:spcBef>
-              <a:defRPr sz="850">
-                <a:solidFill>
-                  <a:srgbClr val="94A3B8"/>
-                </a:solidFill>
-                <a:latin typeface="Arial"/>
-              </a:defRPr>
-            </a:pPr>
-            <a:r>
-              <a:t>Input: 4-Page PDF</a:t>
-            </a:r>
-          </a:p>
-        </p:txBody>
-      </p:sp>
-      <p:sp>
-        <p:nvSpPr>
-          <p:cNvPr id="8" name="TextBox 7"/>
-          <p:cNvSpPr txBox="1"/>
-          <p:nvPr/>
-        </p:nvSpPr>
-        <p:spPr>
-          <a:xfrm>
-            <a:off x="3131820" y="2359152"/>
-            <a:ext cx="365760" cy="219456"/>
+        </p:nvPicPr>
+        <p:blipFill>
+          <a:blip r:embed="rId2"/>
+          <a:stretch>
+            <a:fillRect/>
+          </a:stretch>
+        </p:blipFill>
+        <p:spPr>
+          <a:xfrm>
+            <a:off x="502920" y="1389888"/>
+            <a:ext cx="11185855" cy="5166360"/>
           </a:xfrm>
           <a:prstGeom prst="rect">
             <a:avLst/>
           </a:prstGeom>
-          <a:noFill/>
-        </p:spPr>
-        <p:txBody>
-          <a:bodyPr wrap="none" anchor="ctr" lIns="0" rIns="0" tIns="0" bIns="0">
-            <a:spAutoFit/>
-          </a:bodyPr>
-          <a:lstStyle/>
-          <a:p>
-            <a:pPr algn="ctr">
-              <a:defRPr sz="1300" b="1">
-                <a:solidFill>
-                  <a:srgbClr val="38BDF8"/>
-                </a:solidFill>
-                <a:latin typeface="Arial"/>
-              </a:defRPr>
-            </a:pPr>
-            <a:r>
-              <a:t>↓</a:t>
-            </a:r>
-          </a:p>
-        </p:txBody>
-      </p:sp>
-      <p:sp>
-        <p:nvSpPr>
-          <p:cNvPr id="9" name="Rounded Rectangle 8"/>
-          <p:cNvSpPr/>
-          <p:nvPr/>
-        </p:nvSpPr>
-        <p:spPr>
-          <a:xfrm>
-            <a:off x="1165860" y="2578608"/>
-            <a:ext cx="4297680" cy="384048"/>
-          </a:xfrm>
-          <a:prstGeom prst="roundRect">
-            <a:avLst/>
-          </a:prstGeom>
-          <a:solidFill>
-            <a:srgbClr val="0F172A"/>
-          </a:solidFill>
-          <a:ln w="15240">
-            <a:solidFill>
-              <a:srgbClr val="F59E0B"/>
-            </a:solidFill>
-          </a:ln>
-        </p:spPr>
-        <p:style>
-          <a:lnRef idx="1">
-            <a:schemeClr val="accent1"/>
-          </a:lnRef>
-          <a:fillRef idx="3">
-            <a:schemeClr val="accent1"/>
-          </a:fillRef>
-          <a:effectRef idx="2">
-            <a:schemeClr val="accent1"/>
-          </a:effectRef>
-          <a:fontRef idx="minor">
-            <a:schemeClr val="lt1"/>
-          </a:fontRef>
-        </p:style>
-        <p:txBody>
-          <a:bodyPr rtlCol="0" anchor="ctr" wrap="square" lIns="73152" rIns="73152" tIns="36576" bIns="36576"/>
-          <a:lstStyle/>
-          <a:p>
-            <a:pPr algn="ctr">
-              <a:defRPr sz="1000" b="1">
-                <a:solidFill>
-                  <a:srgbClr val="F59E0B"/>
-                </a:solidFill>
-                <a:latin typeface="Arial"/>
-              </a:defRPr>
-            </a:pPr>
-            <a:r>
-              <a:t>⚙️ check_pdf_integrity</a:t>
-            </a:r>
-          </a:p>
-          <a:p>
-            <a:pPr algn="ctr">
-              <a:spcBef>
-                <a:spcPts val="200"/>
-              </a:spcBef>
-              <a:defRPr sz="850">
-                <a:solidFill>
-                  <a:srgbClr val="94A3B8"/>
-                </a:solidFill>
-                <a:latin typeface="Arial"/>
-              </a:defRPr>
-            </a:pPr>
-            <a:r>
-              <a:t>@task.branch</a:t>
-            </a:r>
-          </a:p>
-        </p:txBody>
-      </p:sp>
-      <p:sp>
-        <p:nvSpPr>
-          <p:cNvPr id="10" name="TextBox 9"/>
-          <p:cNvSpPr txBox="1"/>
-          <p:nvPr/>
-        </p:nvSpPr>
-        <p:spPr>
-          <a:xfrm>
-            <a:off x="2400300" y="2962656"/>
-            <a:ext cx="1828800" cy="219456"/>
-          </a:xfrm>
-          <a:prstGeom prst="rect">
-            <a:avLst/>
-          </a:prstGeom>
-          <a:noFill/>
-        </p:spPr>
-        <p:txBody>
-          <a:bodyPr wrap="none" anchor="ctr" lIns="0" rIns="0" tIns="0" bIns="0">
-            <a:spAutoFit/>
-          </a:bodyPr>
-          <a:lstStyle/>
-          <a:p>
-            <a:pPr algn="ctr">
-              <a:defRPr sz="950" b="1">
-                <a:solidFill>
-                  <a:srgbClr val="C084FC"/>
-                </a:solidFill>
-                <a:latin typeface="Arial"/>
-              </a:defRPr>
-            </a:pPr>
-            <a:r>
-              <a:t>↓ Valid File</a:t>
-            </a:r>
-          </a:p>
-        </p:txBody>
-      </p:sp>
-      <p:sp>
-        <p:nvSpPr>
-          <p:cNvPr id="11" name="Rounded Rectangle 10"/>
-          <p:cNvSpPr/>
-          <p:nvPr/>
-        </p:nvSpPr>
-        <p:spPr>
-          <a:xfrm>
-            <a:off x="1165860" y="3182112"/>
-            <a:ext cx="4297680" cy="384048"/>
-          </a:xfrm>
-          <a:prstGeom prst="roundRect">
-            <a:avLst/>
-          </a:prstGeom>
-          <a:solidFill>
-            <a:srgbClr val="0F172A"/>
-          </a:solidFill>
-          <a:ln w="15240">
-            <a:solidFill>
-              <a:srgbClr val="A855F7"/>
-            </a:solidFill>
-          </a:ln>
-        </p:spPr>
-        <p:style>
-          <a:lnRef idx="1">
-            <a:schemeClr val="accent1"/>
-          </a:lnRef>
-          <a:fillRef idx="3">
-            <a:schemeClr val="accent1"/>
-          </a:fillRef>
-          <a:effectRef idx="2">
-            <a:schemeClr val="accent1"/>
-          </a:effectRef>
-          <a:fontRef idx="minor">
-            <a:schemeClr val="lt1"/>
-          </a:fontRef>
-        </p:style>
-        <p:txBody>
-          <a:bodyPr rtlCol="0" anchor="ctr" wrap="square" lIns="73152" rIns="73152" tIns="36576" bIns="36576"/>
-          <a:lstStyle/>
-          <a:p>
-            <a:pPr algn="ctr">
-              <a:defRPr sz="1000" b="1">
-                <a:solidFill>
-                  <a:srgbClr val="F8FAFC"/>
-                </a:solidFill>
-                <a:latin typeface="Arial"/>
-              </a:defRPr>
-            </a:pPr>
-            <a:r>
-              <a:t>✂️ classify_invoice_pages</a:t>
-            </a:r>
-          </a:p>
-          <a:p>
-            <a:pPr algn="ctr">
-              <a:spcBef>
-                <a:spcPts val="200"/>
-              </a:spcBef>
-              <a:defRPr sz="850">
-                <a:solidFill>
-                  <a:srgbClr val="94A3B8"/>
-                </a:solidFill>
-                <a:latin typeface="Arial"/>
-              </a:defRPr>
-            </a:pPr>
-            <a:r>
-              <a:t>Group 4 Types</a:t>
-            </a:r>
-          </a:p>
-        </p:txBody>
-      </p:sp>
-      <p:sp>
-        <p:nvSpPr>
-          <p:cNvPr id="12" name="TextBox 11"/>
-          <p:cNvSpPr txBox="1"/>
-          <p:nvPr/>
-        </p:nvSpPr>
-        <p:spPr>
-          <a:xfrm>
-            <a:off x="3131820" y="3566160"/>
-            <a:ext cx="365760" cy="219456"/>
-          </a:xfrm>
-          <a:prstGeom prst="rect">
-            <a:avLst/>
-          </a:prstGeom>
-          <a:noFill/>
-        </p:spPr>
-        <p:txBody>
-          <a:bodyPr wrap="none" anchor="ctr" lIns="0" rIns="0" tIns="0" bIns="0">
-            <a:spAutoFit/>
-          </a:bodyPr>
-          <a:lstStyle/>
-          <a:p>
-            <a:pPr algn="ctr">
-              <a:defRPr sz="1300" b="1">
-                <a:solidFill>
-                  <a:srgbClr val="38BDF8"/>
-                </a:solidFill>
-                <a:latin typeface="Arial"/>
-              </a:defRPr>
-            </a:pPr>
-            <a:r>
-              <a:t>↓</a:t>
-            </a:r>
-          </a:p>
-        </p:txBody>
-      </p:sp>
-      <p:sp>
-        <p:nvSpPr>
-          <p:cNvPr id="13" name="Rounded Rectangle 12"/>
-          <p:cNvSpPr/>
-          <p:nvPr/>
-        </p:nvSpPr>
-        <p:spPr>
-          <a:xfrm>
-            <a:off x="1101852" y="3785615"/>
-            <a:ext cx="1051560" cy="621792"/>
-          </a:xfrm>
-          <a:prstGeom prst="roundRect">
-            <a:avLst/>
-          </a:prstGeom>
-          <a:solidFill>
-            <a:srgbClr val="0F172A"/>
-          </a:solidFill>
-          <a:ln w="15240">
-            <a:solidFill>
-              <a:srgbClr val="38BDF8"/>
-            </a:solidFill>
-          </a:ln>
-        </p:spPr>
-        <p:style>
-          <a:lnRef idx="1">
-            <a:schemeClr val="accent1"/>
-          </a:lnRef>
-          <a:fillRef idx="3">
-            <a:schemeClr val="accent1"/>
-          </a:fillRef>
-          <a:effectRef idx="2">
-            <a:schemeClr val="accent1"/>
-          </a:effectRef>
-          <a:fontRef idx="minor">
-            <a:schemeClr val="lt1"/>
-          </a:fontRef>
-        </p:style>
-        <p:txBody>
-          <a:bodyPr rtlCol="0" anchor="ctr" wrap="square" lIns="73152" rIns="73152" tIns="36576" bIns="36576"/>
-          <a:lstStyle/>
-          <a:p>
-            <a:pPr algn="ctr">
-              <a:defRPr sz="900" b="1">
-                <a:solidFill>
-                  <a:srgbClr val="38BDF8"/>
-                </a:solidFill>
-                <a:latin typeface="Arial"/>
-              </a:defRPr>
-            </a:pPr>
-            <a:r>
-              <a:t>⚡ VAT</a:t>
-            </a:r>
-          </a:p>
-          <a:p>
-            <a:pPr algn="ctr">
-              <a:spcBef>
-                <a:spcPts val="200"/>
-              </a:spcBef>
-              <a:defRPr sz="800">
-                <a:solidFill>
-                  <a:srgbClr val="94A3B8"/>
-                </a:solidFill>
-                <a:latin typeface="Arial"/>
-              </a:defRPr>
-            </a:pPr>
-            <a:r>
-              <a:t>Cloud: 55M</a:t>
-            </a:r>
-          </a:p>
-        </p:txBody>
-      </p:sp>
-      <p:sp>
-        <p:nvSpPr>
-          <p:cNvPr id="14" name="Rounded Rectangle 13"/>
-          <p:cNvSpPr/>
-          <p:nvPr/>
-        </p:nvSpPr>
-        <p:spPr>
-          <a:xfrm>
-            <a:off x="2226564" y="3785615"/>
-            <a:ext cx="1051560" cy="621792"/>
-          </a:xfrm>
-          <a:prstGeom prst="roundRect">
-            <a:avLst/>
-          </a:prstGeom>
-          <a:solidFill>
-            <a:srgbClr val="0F172A"/>
-          </a:solidFill>
-          <a:ln w="15240">
-            <a:solidFill>
-              <a:srgbClr val="38BDF8"/>
-            </a:solidFill>
-          </a:ln>
-        </p:spPr>
-        <p:style>
-          <a:lnRef idx="1">
-            <a:schemeClr val="accent1"/>
-          </a:lnRef>
-          <a:fillRef idx="3">
-            <a:schemeClr val="accent1"/>
-          </a:fillRef>
-          <a:effectRef idx="2">
-            <a:schemeClr val="accent1"/>
-          </a:effectRef>
-          <a:fontRef idx="minor">
-            <a:schemeClr val="lt1"/>
-          </a:fontRef>
-        </p:style>
-        <p:txBody>
-          <a:bodyPr rtlCol="0" anchor="ctr" wrap="square" lIns="73152" rIns="73152" tIns="36576" bIns="36576"/>
-          <a:lstStyle/>
-          <a:p>
-            <a:pPr algn="ctr">
-              <a:defRPr sz="900" b="1">
-                <a:solidFill>
-                  <a:srgbClr val="38BDF8"/>
-                </a:solidFill>
-                <a:latin typeface="Arial"/>
-              </a:defRPr>
-            </a:pPr>
-            <a:r>
-              <a:t>⚡ Utility</a:t>
-            </a:r>
-          </a:p>
-          <a:p>
-            <a:pPr algn="ctr">
-              <a:spcBef>
-                <a:spcPts val="200"/>
-              </a:spcBef>
-              <a:defRPr sz="800">
-                <a:solidFill>
-                  <a:srgbClr val="94A3B8"/>
-                </a:solidFill>
-                <a:latin typeface="Arial"/>
-              </a:defRPr>
-            </a:pPr>
-            <a:r>
-              <a:t>EVN: 1.85M</a:t>
-            </a:r>
-          </a:p>
-        </p:txBody>
-      </p:sp>
-      <p:sp>
-        <p:nvSpPr>
-          <p:cNvPr id="15" name="Rounded Rectangle 14"/>
-          <p:cNvSpPr/>
-          <p:nvPr/>
-        </p:nvSpPr>
-        <p:spPr>
-          <a:xfrm>
-            <a:off x="3351276" y="3785615"/>
-            <a:ext cx="1051560" cy="621792"/>
-          </a:xfrm>
-          <a:prstGeom prst="roundRect">
-            <a:avLst/>
-          </a:prstGeom>
-          <a:solidFill>
-            <a:srgbClr val="0F172A"/>
-          </a:solidFill>
-          <a:ln w="15240">
-            <a:solidFill>
-              <a:srgbClr val="38BDF8"/>
-            </a:solidFill>
-          </a:ln>
-        </p:spPr>
-        <p:style>
-          <a:lnRef idx="1">
-            <a:schemeClr val="accent1"/>
-          </a:lnRef>
-          <a:fillRef idx="3">
-            <a:schemeClr val="accent1"/>
-          </a:fillRef>
-          <a:effectRef idx="2">
-            <a:schemeClr val="accent1"/>
-          </a:effectRef>
-          <a:fontRef idx="minor">
-            <a:schemeClr val="lt1"/>
-          </a:fontRef>
-        </p:style>
-        <p:txBody>
-          <a:bodyPr rtlCol="0" anchor="ctr" wrap="square" lIns="73152" rIns="73152" tIns="36576" bIns="36576"/>
-          <a:lstStyle/>
-          <a:p>
-            <a:pPr algn="ctr">
-              <a:defRPr sz="900" b="1">
-                <a:solidFill>
-                  <a:srgbClr val="38BDF8"/>
-                </a:solidFill>
-                <a:latin typeface="Arial"/>
-              </a:defRPr>
-            </a:pPr>
-            <a:r>
-              <a:t>⚡ Travel</a:t>
-            </a:r>
-          </a:p>
-          <a:p>
-            <a:pPr algn="ctr">
-              <a:spcBef>
-                <a:spcPts val="200"/>
-              </a:spcBef>
-              <a:defRPr sz="800">
-                <a:solidFill>
-                  <a:srgbClr val="94A3B8"/>
-                </a:solidFill>
-                <a:latin typeface="Arial"/>
-              </a:defRPr>
-            </a:pPr>
-            <a:r>
-              <a:t>Flight: 3.2M</a:t>
-            </a:r>
-          </a:p>
-        </p:txBody>
-      </p:sp>
-      <p:sp>
-        <p:nvSpPr>
-          <p:cNvPr id="16" name="Rounded Rectangle 15"/>
-          <p:cNvSpPr/>
-          <p:nvPr/>
-        </p:nvSpPr>
-        <p:spPr>
-          <a:xfrm>
-            <a:off x="4475988" y="3785615"/>
-            <a:ext cx="1051560" cy="621792"/>
-          </a:xfrm>
-          <a:prstGeom prst="roundRect">
-            <a:avLst/>
-          </a:prstGeom>
-          <a:solidFill>
-            <a:srgbClr val="FFF1F2"/>
-          </a:solidFill>
-          <a:ln w="15240">
-            <a:solidFill>
-              <a:srgbClr val="F43F5E"/>
-            </a:solidFill>
-          </a:ln>
-        </p:spPr>
-        <p:style>
-          <a:lnRef idx="1">
-            <a:schemeClr val="accent1"/>
-          </a:lnRef>
-          <a:fillRef idx="3">
-            <a:schemeClr val="accent1"/>
-          </a:fillRef>
-          <a:effectRef idx="2">
-            <a:schemeClr val="accent1"/>
-          </a:effectRef>
-          <a:fontRef idx="minor">
-            <a:schemeClr val="lt1"/>
-          </a:fontRef>
-        </p:style>
-        <p:txBody>
-          <a:bodyPr rtlCol="0" anchor="ctr" wrap="square" lIns="73152" rIns="73152" tIns="36576" bIns="36576"/>
-          <a:lstStyle/>
-          <a:p>
-            <a:pPr algn="ctr">
-              <a:defRPr sz="850" b="1">
-                <a:solidFill>
-                  <a:srgbClr val="991B1B"/>
-                </a:solidFill>
-                <a:latin typeface="Arial"/>
-              </a:defRPr>
-            </a:pPr>
-            <a:r>
-              <a:t>⚡ Retail (⚠️)</a:t>
-            </a:r>
-          </a:p>
-          <a:p>
-            <a:pPr algn="ctr">
-              <a:spcBef>
-                <a:spcPts val="200"/>
-              </a:spcBef>
-              <a:defRPr sz="750">
-                <a:solidFill>
-                  <a:srgbClr val="991B1B"/>
-                </a:solidFill>
-                <a:latin typeface="Arial"/>
-              </a:defRPr>
-            </a:pPr>
-            <a:r>
-              <a:t>Retail: 150K</a:t>
-            </a:r>
-          </a:p>
-        </p:txBody>
-      </p:sp>
-      <p:sp>
-        <p:nvSpPr>
-          <p:cNvPr id="17" name="TextBox 16"/>
-          <p:cNvSpPr txBox="1"/>
-          <p:nvPr/>
-        </p:nvSpPr>
-        <p:spPr>
-          <a:xfrm>
-            <a:off x="3131820" y="4425696"/>
-            <a:ext cx="365760" cy="219456"/>
-          </a:xfrm>
-          <a:prstGeom prst="rect">
-            <a:avLst/>
-          </a:prstGeom>
-          <a:noFill/>
-        </p:spPr>
-        <p:txBody>
-          <a:bodyPr wrap="none" anchor="ctr" lIns="0" rIns="0" tIns="0" bIns="0">
-            <a:spAutoFit/>
-          </a:bodyPr>
-          <a:lstStyle/>
-          <a:p>
-            <a:pPr algn="ctr">
-              <a:defRPr sz="1300" b="1">
-                <a:solidFill>
-                  <a:srgbClr val="38BDF8"/>
-                </a:solidFill>
-                <a:latin typeface="Arial"/>
-              </a:defRPr>
-            </a:pPr>
-            <a:r>
-              <a:t>↓</a:t>
-            </a:r>
-          </a:p>
-        </p:txBody>
-      </p:sp>
-      <p:sp>
-        <p:nvSpPr>
-          <p:cNvPr id="18" name="Rounded Rectangle 17"/>
-          <p:cNvSpPr/>
-          <p:nvPr/>
-        </p:nvSpPr>
-        <p:spPr>
-          <a:xfrm>
-            <a:off x="1165860" y="4645152"/>
-            <a:ext cx="4297680" cy="384048"/>
-          </a:xfrm>
-          <a:prstGeom prst="roundRect">
-            <a:avLst/>
-          </a:prstGeom>
-          <a:solidFill>
-            <a:srgbClr val="0F172A"/>
-          </a:solidFill>
-          <a:ln w="15240">
-            <a:solidFill>
-              <a:srgbClr val="A855F7"/>
-            </a:solidFill>
-          </a:ln>
-        </p:spPr>
-        <p:style>
-          <a:lnRef idx="1">
-            <a:schemeClr val="accent1"/>
-          </a:lnRef>
-          <a:fillRef idx="3">
-            <a:schemeClr val="accent1"/>
-          </a:fillRef>
-          <a:effectRef idx="2">
-            <a:schemeClr val="accent1"/>
-          </a:effectRef>
-          <a:fontRef idx="minor">
-            <a:schemeClr val="lt1"/>
-          </a:fontRef>
-        </p:style>
-        <p:txBody>
-          <a:bodyPr rtlCol="0" anchor="ctr" wrap="square" lIns="73152" rIns="73152" tIns="36576" bIns="36576"/>
-          <a:lstStyle/>
-          <a:p>
-            <a:pPr algn="ctr">
-              <a:defRPr sz="950" b="1">
-                <a:solidFill>
-                  <a:srgbClr val="F8FAFC"/>
-                </a:solidFill>
-                <a:latin typeface="Arial"/>
-              </a:defRPr>
-            </a:pPr>
-            <a:r>
-              <a:t>📥 collect_extracted_invoices</a:t>
-            </a:r>
-          </a:p>
-          <a:p>
-            <a:pPr algn="ctr">
-              <a:spcBef>
-                <a:spcPts val="200"/>
-              </a:spcBef>
-              <a:defRPr sz="800">
-                <a:solidFill>
-                  <a:srgbClr val="94A3B8"/>
-                </a:solidFill>
-                <a:latin typeface="Arial"/>
-              </a:defRPr>
-            </a:pPr>
-            <a:r>
-              <a:t>TriggerRule: NONE_FAILED_MIN_ONE_SUCCESS</a:t>
-            </a:r>
-          </a:p>
-        </p:txBody>
-      </p:sp>
-      <p:sp>
-        <p:nvSpPr>
-          <p:cNvPr id="19" name="TextBox 18"/>
-          <p:cNvSpPr txBox="1"/>
-          <p:nvPr/>
-        </p:nvSpPr>
-        <p:spPr>
-          <a:xfrm>
-            <a:off x="3131820" y="5029200"/>
-            <a:ext cx="365760" cy="219456"/>
-          </a:xfrm>
-          <a:prstGeom prst="rect">
-            <a:avLst/>
-          </a:prstGeom>
-          <a:noFill/>
-        </p:spPr>
-        <p:txBody>
-          <a:bodyPr wrap="none" anchor="ctr" lIns="0" rIns="0" tIns="0" bIns="0">
-            <a:spAutoFit/>
-          </a:bodyPr>
-          <a:lstStyle/>
-          <a:p>
-            <a:pPr algn="ctr">
-              <a:defRPr sz="1300" b="1">
-                <a:solidFill>
-                  <a:srgbClr val="38BDF8"/>
-                </a:solidFill>
-                <a:latin typeface="Arial"/>
-              </a:defRPr>
-            </a:pPr>
-            <a:r>
-              <a:t>↓</a:t>
-            </a:r>
-          </a:p>
-        </p:txBody>
-      </p:sp>
-      <p:sp>
-        <p:nvSpPr>
-          <p:cNvPr id="20" name="Rounded Rectangle 19"/>
-          <p:cNvSpPr/>
-          <p:nvPr/>
-        </p:nvSpPr>
-        <p:spPr>
-          <a:xfrm>
-            <a:off x="1110996" y="5248656"/>
-            <a:ext cx="2121408" cy="621792"/>
-          </a:xfrm>
-          <a:prstGeom prst="roundRect">
-            <a:avLst/>
-          </a:prstGeom>
-          <a:solidFill>
-            <a:srgbClr val="064E3B"/>
-          </a:solidFill>
-          <a:ln w="15240">
-            <a:solidFill>
-              <a:srgbClr val="22C55E"/>
-            </a:solidFill>
-          </a:ln>
-        </p:spPr>
-        <p:style>
-          <a:lnRef idx="1">
-            <a:schemeClr val="accent1"/>
-          </a:lnRef>
-          <a:fillRef idx="3">
-            <a:schemeClr val="accent1"/>
-          </a:fillRef>
-          <a:effectRef idx="2">
-            <a:schemeClr val="accent1"/>
-          </a:effectRef>
-          <a:fontRef idx="minor">
-            <a:schemeClr val="lt1"/>
-          </a:fontRef>
-        </p:style>
-        <p:txBody>
-          <a:bodyPr rtlCol="0" anchor="ctr" wrap="square" lIns="73152" rIns="73152" tIns="36576" bIns="36576"/>
-          <a:lstStyle/>
-          <a:p>
-            <a:pPr algn="ctr">
-              <a:defRPr sz="950" b="1">
-                <a:solidFill>
-                  <a:srgbClr val="4ADE80"/>
-                </a:solidFill>
-                <a:latin typeface="Arial"/>
-              </a:defRPr>
-            </a:pPr>
-            <a:r>
-              <a:t>✅ lock_publish_ledger</a:t>
-            </a:r>
-          </a:p>
-          <a:p>
-            <a:pPr algn="ctr">
-              <a:spcBef>
-                <a:spcPts val="200"/>
-              </a:spcBef>
-              <a:defRPr sz="800">
-                <a:solidFill>
-                  <a:srgbClr val="F8FAFC"/>
-                </a:solidFill>
-                <a:latin typeface="Arial"/>
-              </a:defRPr>
-            </a:pPr>
-            <a:r>
-              <a:t>Pass &lt;= 100M: 60.2M</a:t>
-            </a:r>
-          </a:p>
-        </p:txBody>
-      </p:sp>
-      <p:sp>
-        <p:nvSpPr>
-          <p:cNvPr id="21" name="Rounded Rectangle 20"/>
-          <p:cNvSpPr/>
-          <p:nvPr/>
-        </p:nvSpPr>
-        <p:spPr>
-          <a:xfrm>
-            <a:off x="3396996" y="5248656"/>
-            <a:ext cx="2121408" cy="621792"/>
-          </a:xfrm>
-          <a:prstGeom prst="roundRect">
-            <a:avLst/>
-          </a:prstGeom>
-          <a:solidFill>
-            <a:srgbClr val="4C0519"/>
-          </a:solidFill>
-          <a:ln w="15240">
-            <a:solidFill>
-              <a:srgbClr val="F43F5E"/>
-            </a:solidFill>
-          </a:ln>
-        </p:spPr>
-        <p:style>
-          <a:lnRef idx="1">
-            <a:schemeClr val="accent1"/>
-          </a:lnRef>
-          <a:fillRef idx="3">
-            <a:schemeClr val="accent1"/>
-          </a:fillRef>
-          <a:effectRef idx="2">
-            <a:schemeClr val="accent1"/>
-          </a:effectRef>
-          <a:fontRef idx="minor">
-            <a:schemeClr val="lt1"/>
-          </a:fontRef>
-        </p:style>
-        <p:txBody>
-          <a:bodyPr rtlCol="0" anchor="ctr" wrap="square" lIns="73152" rIns="73152" tIns="36576" bIns="36576"/>
-          <a:lstStyle/>
-          <a:p>
-            <a:pPr algn="ctr">
-              <a:defRPr sz="950" b="1">
-                <a:solidFill>
-                  <a:srgbClr val="F87171"/>
-                </a:solidFill>
-                <a:latin typeface="Arial"/>
-              </a:defRPr>
-            </a:pPr>
-            <a:r>
-              <a:t>❌ alert_audit_violation</a:t>
-            </a:r>
-          </a:p>
-          <a:p>
-            <a:pPr algn="ctr">
-              <a:spcBef>
-                <a:spcPts val="200"/>
-              </a:spcBef>
-              <a:defRPr sz="800">
-                <a:solidFill>
-                  <a:srgbClr val="F8FAFC"/>
-                </a:solidFill>
-                <a:latin typeface="Arial"/>
-              </a:defRPr>
-            </a:pPr>
-            <a:r>
-              <a:t>Fail &gt; 100M: Skip Ledger</a:t>
-            </a:r>
-          </a:p>
-        </p:txBody>
-      </p:sp>
-      <p:sp>
-        <p:nvSpPr>
-          <p:cNvPr id="22" name="Rounded Rectangle 21"/>
-          <p:cNvSpPr/>
-          <p:nvPr/>
-        </p:nvSpPr>
-        <p:spPr>
-          <a:xfrm>
-            <a:off x="6293815" y="1536192"/>
-            <a:ext cx="5166360" cy="4846320"/>
-          </a:xfrm>
-          <a:prstGeom prst="roundRect">
-            <a:avLst/>
-          </a:prstGeom>
-          <a:solidFill>
-            <a:srgbClr val="120E20"/>
-          </a:solidFill>
-          <a:ln w="19050">
-            <a:solidFill>
-              <a:srgbClr val="C084FC"/>
-            </a:solidFill>
-          </a:ln>
-        </p:spPr>
-        <p:style>
-          <a:lnRef idx="1">
-            <a:schemeClr val="accent1"/>
-          </a:lnRef>
-          <a:fillRef idx="3">
-            <a:schemeClr val="accent1"/>
-          </a:fillRef>
-          <a:effectRef idx="2">
-            <a:schemeClr val="accent1"/>
-          </a:effectRef>
-          <a:fontRef idx="minor">
-            <a:schemeClr val="lt1"/>
-          </a:fontRef>
-        </p:style>
-        <p:txBody>
-          <a:bodyPr rtlCol="0" anchor="ctr"/>
-          <a:lstStyle/>
-          <a:p>
-            <a:pPr algn="ctr"/>
-          </a:p>
-        </p:txBody>
-      </p:sp>
-      <p:sp>
-        <p:nvSpPr>
-          <p:cNvPr id="23" name="Rounded Rectangle 22"/>
-          <p:cNvSpPr/>
-          <p:nvPr/>
-        </p:nvSpPr>
-        <p:spPr>
-          <a:xfrm>
-            <a:off x="6403543" y="1609344"/>
-            <a:ext cx="4946904" cy="292608"/>
-          </a:xfrm>
-          <a:prstGeom prst="roundRect">
-            <a:avLst/>
-          </a:prstGeom>
-          <a:solidFill>
-            <a:srgbClr val="200E34"/>
-          </a:solidFill>
-          <a:ln w="12700">
-            <a:solidFill>
-              <a:srgbClr val="C084FC"/>
-            </a:solidFill>
-          </a:ln>
-        </p:spPr>
-        <p:style>
-          <a:lnRef idx="1">
-            <a:schemeClr val="accent1"/>
-          </a:lnRef>
-          <a:fillRef idx="3">
-            <a:schemeClr val="accent1"/>
-          </a:fillRef>
-          <a:effectRef idx="2">
-            <a:schemeClr val="accent1"/>
-          </a:effectRef>
-          <a:fontRef idx="minor">
-            <a:schemeClr val="lt1"/>
-          </a:fontRef>
-        </p:style>
-        <p:txBody>
-          <a:bodyPr rtlCol="0" anchor="ctr"/>
-          <a:lstStyle/>
-          <a:p>
-            <a:pPr algn="ctr">
-              <a:defRPr sz="950" b="1">
-                <a:solidFill>
-                  <a:srgbClr val="C084FC"/>
-                </a:solidFill>
-                <a:latin typeface="Arial"/>
-              </a:defRPr>
-            </a:pPr>
-            <a:r>
-              <a:t>💎 GÓC NHÌN DAGSTER (Asset-Centric)  |  Tạo tài sản gì? • Khiên Checks • I/O Manager</a:t>
-            </a:r>
-          </a:p>
-        </p:txBody>
-      </p:sp>
-      <p:sp>
-        <p:nvSpPr>
-          <p:cNvPr id="24" name="Rounded Rectangle 23"/>
-          <p:cNvSpPr/>
-          <p:nvPr/>
-        </p:nvSpPr>
-        <p:spPr>
-          <a:xfrm>
-            <a:off x="6682435" y="1975104"/>
-            <a:ext cx="4389120" cy="384048"/>
-          </a:xfrm>
-          <a:prstGeom prst="roundRect">
-            <a:avLst/>
-          </a:prstGeom>
-          <a:solidFill>
-            <a:srgbClr val="1E1B4B"/>
-          </a:solidFill>
-          <a:ln w="15240">
-            <a:solidFill>
-              <a:srgbClr val="818CF8"/>
-            </a:solidFill>
-          </a:ln>
-        </p:spPr>
-        <p:style>
-          <a:lnRef idx="1">
-            <a:schemeClr val="accent1"/>
-          </a:lnRef>
-          <a:fillRef idx="3">
-            <a:schemeClr val="accent1"/>
-          </a:fillRef>
-          <a:effectRef idx="2">
-            <a:schemeClr val="accent1"/>
-          </a:effectRef>
-          <a:fontRef idx="minor">
-            <a:schemeClr val="lt1"/>
-          </a:fontRef>
-        </p:style>
-        <p:txBody>
-          <a:bodyPr rtlCol="0" anchor="ctr" wrap="square" lIns="73152" rIns="73152" tIns="36576" bIns="36576"/>
-          <a:lstStyle/>
-          <a:p>
-            <a:pPr algn="ctr">
-              <a:defRPr sz="1000" b="1">
-                <a:solidFill>
-                  <a:srgbClr val="E0E7FF"/>
-                </a:solidFill>
-                <a:latin typeface="Arial"/>
-              </a:defRPr>
-            </a:pPr>
-            <a:r>
-              <a:t>📄 raw_multipage_invoice_pdf</a:t>
-            </a:r>
-          </a:p>
-          <a:p>
-            <a:pPr algn="ctr">
-              <a:spcBef>
-                <a:spcPts val="200"/>
-              </a:spcBef>
-              <a:defRPr sz="850">
-                <a:solidFill>
-                  <a:srgbClr val="38BDF8"/>
-                </a:solidFill>
-                <a:latin typeface="Arial"/>
-              </a:defRPr>
-            </a:pPr>
-            <a:r>
-              <a:t>🛡️ check_pdf_file_integrity</a:t>
-            </a:r>
-          </a:p>
-        </p:txBody>
-      </p:sp>
-      <p:sp>
-        <p:nvSpPr>
-          <p:cNvPr id="25" name="TextBox 24"/>
-          <p:cNvSpPr txBox="1"/>
-          <p:nvPr/>
-        </p:nvSpPr>
-        <p:spPr>
-          <a:xfrm>
-            <a:off x="8694115" y="2359152"/>
-            <a:ext cx="365760" cy="219456"/>
-          </a:xfrm>
-          <a:prstGeom prst="rect">
-            <a:avLst/>
-          </a:prstGeom>
-          <a:noFill/>
-        </p:spPr>
-        <p:txBody>
-          <a:bodyPr wrap="none" anchor="ctr" lIns="0" rIns="0" tIns="0" bIns="0">
-            <a:spAutoFit/>
-          </a:bodyPr>
-          <a:lstStyle/>
-          <a:p>
-            <a:pPr algn="ctr">
-              <a:defRPr sz="1300" b="1">
-                <a:solidFill>
-                  <a:srgbClr val="C084FC"/>
-                </a:solidFill>
-                <a:latin typeface="Arial"/>
-              </a:defRPr>
-            </a:pPr>
-            <a:r>
-              <a:t>↓</a:t>
-            </a:r>
-          </a:p>
-        </p:txBody>
-      </p:sp>
-      <p:sp>
-        <p:nvSpPr>
-          <p:cNvPr id="26" name="Rounded Rectangle 25"/>
-          <p:cNvSpPr/>
-          <p:nvPr/>
-        </p:nvSpPr>
-        <p:spPr>
-          <a:xfrm>
-            <a:off x="6682435" y="2578608"/>
-            <a:ext cx="4389120" cy="384048"/>
-          </a:xfrm>
-          <a:prstGeom prst="roundRect">
-            <a:avLst/>
-          </a:prstGeom>
-          <a:solidFill>
-            <a:srgbClr val="1E1B4B"/>
-          </a:solidFill>
-          <a:ln w="15240">
-            <a:solidFill>
-              <a:srgbClr val="818CF8"/>
-            </a:solidFill>
-          </a:ln>
-        </p:spPr>
-        <p:style>
-          <a:lnRef idx="1">
-            <a:schemeClr val="accent1"/>
-          </a:lnRef>
-          <a:fillRef idx="3">
-            <a:schemeClr val="accent1"/>
-          </a:fillRef>
-          <a:effectRef idx="2">
-            <a:schemeClr val="accent1"/>
-          </a:effectRef>
-          <a:fontRef idx="minor">
-            <a:schemeClr val="lt1"/>
-          </a:fontRef>
-        </p:style>
-        <p:txBody>
-          <a:bodyPr rtlCol="0" anchor="ctr" wrap="square" lIns="73152" rIns="73152" tIns="36576" bIns="36576"/>
-          <a:lstStyle/>
-          <a:p>
-            <a:pPr algn="ctr">
-              <a:defRPr sz="1000" b="1">
-                <a:solidFill>
-                  <a:srgbClr val="E0E7FF"/>
-                </a:solidFill>
-                <a:latin typeface="Arial"/>
-              </a:defRPr>
-            </a:pPr>
-            <a:r>
-              <a:t>📑 extracted_invoice_pages</a:t>
-            </a:r>
-          </a:p>
-          <a:p>
-            <a:pPr algn="ctr">
-              <a:spcBef>
-                <a:spcPts val="200"/>
-              </a:spcBef>
-              <a:defRPr sz="850">
-                <a:solidFill>
-                  <a:srgbClr val="94A3B8"/>
-                </a:solidFill>
-                <a:latin typeface="Arial"/>
-              </a:defRPr>
-            </a:pPr>
-            <a:r>
-              <a:t>OCR &amp; AI Parsing</a:t>
-            </a:r>
-          </a:p>
-        </p:txBody>
-      </p:sp>
-      <p:sp>
-        <p:nvSpPr>
-          <p:cNvPr id="27" name="TextBox 26"/>
-          <p:cNvSpPr txBox="1"/>
-          <p:nvPr/>
-        </p:nvSpPr>
-        <p:spPr>
-          <a:xfrm>
-            <a:off x="8694115" y="2962656"/>
-            <a:ext cx="365760" cy="219456"/>
-          </a:xfrm>
-          <a:prstGeom prst="rect">
-            <a:avLst/>
-          </a:prstGeom>
-          <a:noFill/>
-        </p:spPr>
-        <p:txBody>
-          <a:bodyPr wrap="none" anchor="ctr" lIns="0" rIns="0" tIns="0" bIns="0">
-            <a:spAutoFit/>
-          </a:bodyPr>
-          <a:lstStyle/>
-          <a:p>
-            <a:pPr algn="ctr">
-              <a:defRPr sz="1300" b="1">
-                <a:solidFill>
-                  <a:srgbClr val="C084FC"/>
-                </a:solidFill>
-                <a:latin typeface="Arial"/>
-              </a:defRPr>
-            </a:pPr>
-            <a:r>
-              <a:t>↓</a:t>
-            </a:r>
-          </a:p>
-        </p:txBody>
-      </p:sp>
-      <p:sp>
-        <p:nvSpPr>
-          <p:cNvPr id="28" name="Rounded Rectangle 27"/>
-          <p:cNvSpPr/>
-          <p:nvPr/>
-        </p:nvSpPr>
-        <p:spPr>
-          <a:xfrm>
-            <a:off x="6664147" y="3182112"/>
-            <a:ext cx="1051560" cy="640080"/>
-          </a:xfrm>
-          <a:prstGeom prst="roundRect">
-            <a:avLst/>
-          </a:prstGeom>
-          <a:solidFill>
-            <a:srgbClr val="2E1065"/>
-          </a:solidFill>
-          <a:ln w="15240">
-            <a:solidFill>
-              <a:srgbClr val="C084FC"/>
-            </a:solidFill>
-          </a:ln>
-        </p:spPr>
-        <p:style>
-          <a:lnRef idx="1">
-            <a:schemeClr val="accent1"/>
-          </a:lnRef>
-          <a:fillRef idx="3">
-            <a:schemeClr val="accent1"/>
-          </a:fillRef>
-          <a:effectRef idx="2">
-            <a:schemeClr val="accent1"/>
-          </a:effectRef>
-          <a:fontRef idx="minor">
-            <a:schemeClr val="lt1"/>
-          </a:fontRef>
-        </p:style>
-        <p:txBody>
-          <a:bodyPr rtlCol="0" anchor="ctr" wrap="square" lIns="73152" rIns="73152" tIns="36576" bIns="36576"/>
-          <a:lstStyle/>
-          <a:p>
-            <a:pPr algn="ctr">
-              <a:defRPr sz="850" b="1">
-                <a:solidFill>
-                  <a:srgbClr val="F3E8FF"/>
-                </a:solidFill>
-                <a:latin typeface="Arial"/>
-              </a:defRPr>
-            </a:pPr>
-            <a:r>
-              <a:t>⚡ vat_invoices</a:t>
-            </a:r>
-          </a:p>
-          <a:p>
-            <a:pPr algn="ctr">
-              <a:spcBef>
-                <a:spcPts val="200"/>
-              </a:spcBef>
-              <a:defRPr sz="800">
-                <a:solidFill>
-                  <a:srgbClr val="94A3B8"/>
-                </a:solidFill>
-                <a:latin typeface="Arial"/>
-              </a:defRPr>
-            </a:pPr>
-            <a:r>
-              <a:t>55M (VAT 5M)</a:t>
-            </a:r>
-          </a:p>
-        </p:txBody>
-      </p:sp>
-      <p:sp>
-        <p:nvSpPr>
-          <p:cNvPr id="29" name="Rounded Rectangle 28"/>
-          <p:cNvSpPr/>
-          <p:nvPr/>
-        </p:nvSpPr>
-        <p:spPr>
-          <a:xfrm>
-            <a:off x="7788859" y="3182112"/>
-            <a:ext cx="1051560" cy="640080"/>
-          </a:xfrm>
-          <a:prstGeom prst="roundRect">
-            <a:avLst/>
-          </a:prstGeom>
-          <a:solidFill>
-            <a:srgbClr val="2E1065"/>
-          </a:solidFill>
-          <a:ln w="15240">
-            <a:solidFill>
-              <a:srgbClr val="C084FC"/>
-            </a:solidFill>
-          </a:ln>
-        </p:spPr>
-        <p:style>
-          <a:lnRef idx="1">
-            <a:schemeClr val="accent1"/>
-          </a:lnRef>
-          <a:fillRef idx="3">
-            <a:schemeClr val="accent1"/>
-          </a:fillRef>
-          <a:effectRef idx="2">
-            <a:schemeClr val="accent1"/>
-          </a:effectRef>
-          <a:fontRef idx="minor">
-            <a:schemeClr val="lt1"/>
-          </a:fontRef>
-        </p:style>
-        <p:txBody>
-          <a:bodyPr rtlCol="0" anchor="ctr" wrap="square" lIns="73152" rIns="73152" tIns="36576" bIns="36576"/>
-          <a:lstStyle/>
-          <a:p>
-            <a:pPr algn="ctr">
-              <a:defRPr sz="850" b="1">
-                <a:solidFill>
-                  <a:srgbClr val="F3E8FF"/>
-                </a:solidFill>
-                <a:latin typeface="Arial"/>
-              </a:defRPr>
-            </a:pPr>
-            <a:r>
-              <a:t>⚡ utility_inv</a:t>
-            </a:r>
-          </a:p>
-          <a:p>
-            <a:pPr algn="ctr">
-              <a:spcBef>
-                <a:spcPts val="200"/>
-              </a:spcBef>
-              <a:defRPr sz="800">
-                <a:solidFill>
-                  <a:srgbClr val="94A3B8"/>
-                </a:solidFill>
-                <a:latin typeface="Arial"/>
-              </a:defRPr>
-            </a:pPr>
-            <a:r>
-              <a:t>EVN: 1.85M</a:t>
-            </a:r>
-          </a:p>
-        </p:txBody>
-      </p:sp>
-      <p:sp>
-        <p:nvSpPr>
-          <p:cNvPr id="30" name="Rounded Rectangle 29"/>
-          <p:cNvSpPr/>
-          <p:nvPr/>
-        </p:nvSpPr>
-        <p:spPr>
-          <a:xfrm>
-            <a:off x="8913571" y="3182112"/>
-            <a:ext cx="1051560" cy="640080"/>
-          </a:xfrm>
-          <a:prstGeom prst="roundRect">
-            <a:avLst/>
-          </a:prstGeom>
-          <a:solidFill>
-            <a:srgbClr val="2E1065"/>
-          </a:solidFill>
-          <a:ln w="15240">
-            <a:solidFill>
-              <a:srgbClr val="C084FC"/>
-            </a:solidFill>
-          </a:ln>
-        </p:spPr>
-        <p:style>
-          <a:lnRef idx="1">
-            <a:schemeClr val="accent1"/>
-          </a:lnRef>
-          <a:fillRef idx="3">
-            <a:schemeClr val="accent1"/>
-          </a:fillRef>
-          <a:effectRef idx="2">
-            <a:schemeClr val="accent1"/>
-          </a:effectRef>
-          <a:fontRef idx="minor">
-            <a:schemeClr val="lt1"/>
-          </a:fontRef>
-        </p:style>
-        <p:txBody>
-          <a:bodyPr rtlCol="0" anchor="ctr" wrap="square" lIns="73152" rIns="73152" tIns="36576" bIns="36576"/>
-          <a:lstStyle/>
-          <a:p>
-            <a:pPr algn="ctr">
-              <a:defRPr sz="850" b="1">
-                <a:solidFill>
-                  <a:srgbClr val="F3E8FF"/>
-                </a:solidFill>
-                <a:latin typeface="Arial"/>
-              </a:defRPr>
-            </a:pPr>
-            <a:r>
-              <a:t>⚡ reimburse</a:t>
-            </a:r>
-          </a:p>
-          <a:p>
-            <a:pPr algn="ctr">
-              <a:spcBef>
-                <a:spcPts val="200"/>
-              </a:spcBef>
-              <a:defRPr sz="800">
-                <a:solidFill>
-                  <a:srgbClr val="94A3B8"/>
-                </a:solidFill>
-                <a:latin typeface="Arial"/>
-              </a:defRPr>
-            </a:pPr>
-            <a:r>
-              <a:t>Flight: 3.2M</a:t>
-            </a:r>
-          </a:p>
-        </p:txBody>
-      </p:sp>
-      <p:sp>
-        <p:nvSpPr>
-          <p:cNvPr id="31" name="Rounded Rectangle 30"/>
-          <p:cNvSpPr/>
-          <p:nvPr/>
-        </p:nvSpPr>
-        <p:spPr>
-          <a:xfrm>
-            <a:off x="10038283" y="3182112"/>
-            <a:ext cx="1051560" cy="640080"/>
-          </a:xfrm>
-          <a:prstGeom prst="roundRect">
-            <a:avLst/>
-          </a:prstGeom>
-          <a:solidFill>
-            <a:srgbClr val="3B0764"/>
-          </a:solidFill>
-          <a:ln w="15240">
-            <a:solidFill>
-              <a:srgbClr val="F43F5E"/>
-            </a:solidFill>
-          </a:ln>
-        </p:spPr>
-        <p:style>
-          <a:lnRef idx="1">
-            <a:schemeClr val="accent1"/>
-          </a:lnRef>
-          <a:fillRef idx="3">
-            <a:schemeClr val="accent1"/>
-          </a:fillRef>
-          <a:effectRef idx="2">
-            <a:schemeClr val="accent1"/>
-          </a:effectRef>
-          <a:fontRef idx="minor">
-            <a:schemeClr val="lt1"/>
-          </a:fontRef>
-        </p:style>
-        <p:txBody>
-          <a:bodyPr rtlCol="0" anchor="ctr" wrap="square" lIns="73152" rIns="73152" tIns="36576" bIns="36576"/>
-          <a:lstStyle/>
-          <a:p>
-            <a:pPr algn="ctr">
-              <a:defRPr sz="850" b="1">
-                <a:solidFill>
-                  <a:srgbClr val="FECDD3"/>
-                </a:solidFill>
-                <a:latin typeface="Arial"/>
-              </a:defRPr>
-            </a:pPr>
-            <a:r>
-              <a:t>⚡ invalid_inv</a:t>
-            </a:r>
-          </a:p>
-          <a:p>
-            <a:pPr algn="ctr">
-              <a:spcBef>
-                <a:spcPts val="200"/>
-              </a:spcBef>
-              <a:defRPr sz="800">
-                <a:solidFill>
-                  <a:srgbClr val="94A3B8"/>
-                </a:solidFill>
-                <a:latin typeface="Arial"/>
-              </a:defRPr>
-            </a:pPr>
-            <a:r>
-              <a:t>Retail: 150K ⚠️</a:t>
-            </a:r>
-          </a:p>
-        </p:txBody>
-      </p:sp>
-      <p:sp>
-        <p:nvSpPr>
-          <p:cNvPr id="32" name="TextBox 31"/>
-          <p:cNvSpPr txBox="1"/>
-          <p:nvPr/>
-        </p:nvSpPr>
-        <p:spPr>
-          <a:xfrm>
-            <a:off x="7688275" y="3840480"/>
-            <a:ext cx="2377440" cy="219456"/>
-          </a:xfrm>
-          <a:prstGeom prst="rect">
-            <a:avLst/>
-          </a:prstGeom>
-          <a:noFill/>
-        </p:spPr>
-        <p:txBody>
-          <a:bodyPr wrap="none" anchor="ctr" lIns="0" rIns="0" tIns="0" bIns="0">
-            <a:spAutoFit/>
-          </a:bodyPr>
-          <a:lstStyle/>
-          <a:p>
-            <a:pPr algn="ctr">
-              <a:defRPr sz="950" b="1">
-                <a:solidFill>
-                  <a:srgbClr val="C084FC"/>
-                </a:solidFill>
-                <a:latin typeface="Arial"/>
-              </a:defRPr>
-            </a:pPr>
-            <a:r>
-              <a:t>↓ Fan-In Convergence</a:t>
-            </a:r>
-          </a:p>
-        </p:txBody>
-      </p:sp>
-      <p:sp>
-        <p:nvSpPr>
-          <p:cNvPr id="33" name="Rounded Rectangle 32"/>
-          <p:cNvSpPr/>
-          <p:nvPr/>
-        </p:nvSpPr>
-        <p:spPr>
-          <a:xfrm>
-            <a:off x="6682435" y="4096512"/>
-            <a:ext cx="4389120" cy="502920"/>
-          </a:xfrm>
-          <a:prstGeom prst="roundRect">
-            <a:avLst/>
-          </a:prstGeom>
-          <a:solidFill>
-            <a:srgbClr val="2E1065"/>
-          </a:solidFill>
-          <a:ln w="15240">
-            <a:solidFill>
-              <a:srgbClr val="C084FC"/>
-            </a:solidFill>
-          </a:ln>
-        </p:spPr>
-        <p:style>
-          <a:lnRef idx="1">
-            <a:schemeClr val="accent1"/>
-          </a:lnRef>
-          <a:fillRef idx="3">
-            <a:schemeClr val="accent1"/>
-          </a:fillRef>
-          <a:effectRef idx="2">
-            <a:schemeClr val="accent1"/>
-          </a:effectRef>
-          <a:fontRef idx="minor">
-            <a:schemeClr val="lt1"/>
-          </a:fontRef>
-        </p:style>
-        <p:txBody>
-          <a:bodyPr rtlCol="0" anchor="ctr" wrap="square" lIns="73152" rIns="73152" tIns="36576" bIns="36576"/>
-          <a:lstStyle/>
-          <a:p>
-            <a:pPr algn="ctr">
-              <a:defRPr sz="1000" b="1">
-                <a:solidFill>
-                  <a:srgbClr val="F3E8FF"/>
-                </a:solidFill>
-                <a:latin typeface="Arial"/>
-              </a:defRPr>
-            </a:pPr>
-            <a:r>
-              <a:t>📊 categorized_invoices</a:t>
-            </a:r>
-          </a:p>
-          <a:p>
-            <a:pPr algn="ctr">
-              <a:spcBef>
-                <a:spcPts val="200"/>
-              </a:spcBef>
-              <a:defRPr sz="850">
-                <a:solidFill>
-                  <a:srgbClr val="F59E0B"/>
-                </a:solidFill>
-                <a:latin typeface="Arial"/>
-              </a:defRPr>
-            </a:pPr>
-            <a:r>
-              <a:t>🛡️ check_vat_tax_math  |  🛡️ check_budget_limit (blocking=True)</a:t>
-            </a:r>
-          </a:p>
-        </p:txBody>
-      </p:sp>
-      <p:sp>
-        <p:nvSpPr>
-          <p:cNvPr id="34" name="TextBox 33"/>
-          <p:cNvSpPr txBox="1"/>
-          <p:nvPr/>
-        </p:nvSpPr>
-        <p:spPr>
-          <a:xfrm>
-            <a:off x="7962595" y="4626864"/>
-            <a:ext cx="1828800" cy="219456"/>
-          </a:xfrm>
-          <a:prstGeom prst="rect">
-            <a:avLst/>
-          </a:prstGeom>
-          <a:noFill/>
-        </p:spPr>
-        <p:txBody>
-          <a:bodyPr wrap="none" anchor="ctr" lIns="0" rIns="0" tIns="0" bIns="0">
-            <a:spAutoFit/>
-          </a:bodyPr>
-          <a:lstStyle/>
-          <a:p>
-            <a:pPr algn="ctr">
-              <a:defRPr sz="950" b="1">
-                <a:solidFill>
-                  <a:srgbClr val="22C55E"/>
-                </a:solidFill>
-                <a:latin typeface="Arial"/>
-              </a:defRPr>
-            </a:pPr>
-            <a:r>
-              <a:t>↓ Materialize</a:t>
-            </a:r>
-          </a:p>
-        </p:txBody>
-      </p:sp>
-      <p:sp>
-        <p:nvSpPr>
-          <p:cNvPr id="35" name="Rounded Rectangle 34"/>
-          <p:cNvSpPr/>
-          <p:nvPr/>
-        </p:nvSpPr>
-        <p:spPr>
-          <a:xfrm>
-            <a:off x="6682435" y="4864608"/>
-            <a:ext cx="4389120" cy="548640"/>
-          </a:xfrm>
-          <a:prstGeom prst="roundRect">
-            <a:avLst/>
-          </a:prstGeom>
-          <a:solidFill>
-            <a:srgbClr val="064E3B"/>
-          </a:solidFill>
-          <a:ln w="15240">
-            <a:solidFill>
-              <a:srgbClr val="22C55E"/>
-            </a:solidFill>
-          </a:ln>
-        </p:spPr>
-        <p:style>
-          <a:lnRef idx="1">
-            <a:schemeClr val="accent1"/>
-          </a:lnRef>
-          <a:fillRef idx="3">
-            <a:schemeClr val="accent1"/>
-          </a:fillRef>
-          <a:effectRef idx="2">
-            <a:schemeClr val="accent1"/>
-          </a:effectRef>
-          <a:fontRef idx="minor">
-            <a:schemeClr val="lt1"/>
-          </a:fontRef>
-        </p:style>
-        <p:txBody>
-          <a:bodyPr rtlCol="0" anchor="ctr" wrap="square" lIns="73152" rIns="73152" tIns="36576" bIns="36576"/>
-          <a:lstStyle/>
-          <a:p>
-            <a:pPr algn="ctr">
-              <a:defRPr sz="1050" b="1">
-                <a:solidFill>
-                  <a:srgbClr val="4ADE80"/>
-                </a:solidFill>
-                <a:latin typeface="Arial"/>
-              </a:defRPr>
-            </a:pPr>
-            <a:r>
-              <a:t>💎 monthly_expense_ledger</a:t>
-            </a:r>
-          </a:p>
-          <a:p>
-            <a:pPr algn="ctr">
-              <a:spcBef>
-                <a:spcPts val="200"/>
-              </a:spcBef>
-              <a:defRPr sz="850">
-                <a:solidFill>
-                  <a:srgbClr val="F8FAFC"/>
-                </a:solidFill>
-                <a:latin typeface="Arial"/>
-              </a:defRPr>
-            </a:pPr>
-            <a:r>
-              <a:t>Approved: 60.2M VND (Published to Storage &amp; Dashboard)</a:t>
-            </a:r>
-          </a:p>
-        </p:txBody>
-      </p:sp>
+        </p:spPr>
+      </p:pic>
     </p:spTree>
   </p:cSld>
   <p:clrMapOvr>

--- a/Airflow_vs_Dagster_Thuyet_Trinh.pptx
+++ b/Airflow_vs_Dagster_Thuyet_Trinh.pptx
@@ -4269,11 +4269,13 @@
         </p:nvSpPr>
         <p:spPr>
           <a:xfrm>
-            <a:off x="3474720" y="502920"/>
-            <a:ext cx="5242255" cy="347472"/>
+            <a:off x="3474720" y="365760"/>
+            <a:ext cx="5242255" cy="292608"/>
           </a:xfrm>
           <a:prstGeom prst="roundRect">
-            <a:avLst/>
+            <a:avLst>
+              <a:gd name="adj" fmla="val 50000"/>
+            </a:avLst>
           </a:prstGeom>
           <a:solidFill>
             <a:srgbClr val="120E20"/>
@@ -4303,7 +4305,7 @@
           <a:lstStyle/>
           <a:p>
             <a:pPr algn="ctr">
-              <a:defRPr sz="1000" b="1">
+              <a:defRPr sz="950" b="1">
                 <a:solidFill>
                   <a:srgbClr val="38BDF8"/>
                 </a:solidFill>
@@ -4324,8 +4326,8 @@
         </p:nvSpPr>
         <p:spPr>
           <a:xfrm>
-            <a:off x="914400" y="1051560"/>
-            <a:ext cx="10362895" cy="1645920"/>
+            <a:off x="731520" y="868680"/>
+            <a:ext cx="10728655" cy="1280160"/>
           </a:xfrm>
           <a:prstGeom prst="rect">
             <a:avLst/>
@@ -4339,7 +4341,7 @@
           <a:lstStyle/>
           <a:p>
             <a:pPr algn="ctr">
-              <a:defRPr sz="3500" b="1">
+              <a:defRPr sz="3200" b="1">
                 <a:solidFill>
                   <a:srgbClr val="F8FAFC"/>
                 </a:solidFill>
@@ -4353,9 +4355,9 @@
           <a:p>
             <a:pPr algn="ctr">
               <a:spcBef>
-                <a:spcPts val="800"/>
-              </a:spcBef>
-              <a:defRPr sz="1600">
+                <a:spcPts val="600"/>
+              </a:spcBef>
+              <a:defRPr sz="1400">
                 <a:solidFill>
                   <a:srgbClr val="38BDF8"/>
                 </a:solidFill>
@@ -4376,16 +4378,18 @@
         </p:nvSpPr>
         <p:spPr>
           <a:xfrm>
-            <a:off x="1097280" y="2926080"/>
-            <a:ext cx="4343400" cy="2834640"/>
+            <a:off x="731520" y="2267712"/>
+            <a:ext cx="5166360" cy="3931920"/>
           </a:xfrm>
           <a:prstGeom prst="roundRect">
-            <a:avLst/>
+            <a:avLst>
+              <a:gd name="adj" fmla="val 5000"/>
+            </a:avLst>
           </a:prstGeom>
           <a:solidFill>
             <a:srgbClr val="120E20"/>
           </a:solidFill>
-          <a:ln w="22860">
+          <a:ln w="19050">
             <a:solidFill>
               <a:srgbClr val="38BDF8"/>
             </a:solidFill>
@@ -4406,11 +4410,11 @@
           </a:fontRef>
         </p:style>
         <p:txBody>
-          <a:bodyPr rtlCol="0" anchor="ctr" wrap="square" lIns="256032" rIns="256032" tIns="201168" bIns="182880"/>
+          <a:bodyPr rtlCol="0" anchor="ctr" wrap="square" lIns="256032" rIns="256032" tIns="219456" bIns="182880"/>
           <a:lstStyle/>
           <a:p>
             <a:pPr algn="ctr">
-              <a:defRPr sz="2000" b="1">
+              <a:defRPr sz="1800" b="1">
                 <a:solidFill>
                   <a:srgbClr val="38BDF8"/>
                 </a:solidFill>
@@ -4440,9 +4444,9 @@
           <a:p>
             <a:pPr>
               <a:spcBef>
-                <a:spcPts val="600"/>
-              </a:spcBef>
-              <a:defRPr sz="1120">
+                <a:spcPts val="800"/>
+              </a:spcBef>
+              <a:defRPr sz="1100">
                 <a:solidFill>
                   <a:srgbClr val="94A3B8"/>
                 </a:solidFill>
@@ -4456,9 +4460,9 @@
           <a:p>
             <a:pPr>
               <a:spcBef>
-                <a:spcPts val="600"/>
-              </a:spcBef>
-              <a:defRPr sz="1120">
+                <a:spcPts val="800"/>
+              </a:spcBef>
+              <a:defRPr sz="1100">
                 <a:solidFill>
                   <a:srgbClr val="94A3B8"/>
                 </a:solidFill>
@@ -4472,9 +4476,9 @@
           <a:p>
             <a:pPr>
               <a:spcBef>
-                <a:spcPts val="600"/>
-              </a:spcBef>
-              <a:defRPr sz="1120">
+                <a:spcPts val="800"/>
+              </a:spcBef>
+              <a:defRPr sz="1100">
                 <a:solidFill>
                   <a:srgbClr val="94A3B8"/>
                 </a:solidFill>
@@ -4488,9 +4492,9 @@
           <a:p>
             <a:pPr>
               <a:spcBef>
-                <a:spcPts val="600"/>
-              </a:spcBef>
-              <a:defRPr sz="1120">
+                <a:spcPts val="800"/>
+              </a:spcBef>
+              <a:defRPr sz="1100">
                 <a:solidFill>
                   <a:srgbClr val="94A3B8"/>
                 </a:solidFill>
@@ -4511,16 +4515,18 @@
         </p:nvSpPr>
         <p:spPr>
           <a:xfrm>
-            <a:off x="5570067" y="3794760"/>
-            <a:ext cx="1051560" cy="1051560"/>
+            <a:off x="5638647" y="3794760"/>
+            <a:ext cx="914400" cy="914400"/>
           </a:xfrm>
           <a:prstGeom prst="roundRect">
-            <a:avLst/>
+            <a:avLst>
+              <a:gd name="adj" fmla="val 15000"/>
+            </a:avLst>
           </a:prstGeom>
           <a:solidFill>
             <a:srgbClr val="1A1032"/>
           </a:solidFill>
-          <a:ln w="27940">
+          <a:ln w="19050">
             <a:solidFill>
               <a:srgbClr val="C084FC"/>
             </a:solidFill>
@@ -4566,16 +4572,18 @@
         </p:nvSpPr>
         <p:spPr>
           <a:xfrm>
-            <a:off x="6751015" y="2926080"/>
-            <a:ext cx="4343400" cy="2834640"/>
+            <a:off x="6293815" y="2267712"/>
+            <a:ext cx="5166360" cy="3931920"/>
           </a:xfrm>
           <a:prstGeom prst="roundRect">
-            <a:avLst/>
+            <a:avLst>
+              <a:gd name="adj" fmla="val 5000"/>
+            </a:avLst>
           </a:prstGeom>
           <a:solidFill>
             <a:srgbClr val="120E20"/>
           </a:solidFill>
-          <a:ln w="22860">
+          <a:ln w="19050">
             <a:solidFill>
               <a:srgbClr val="C084FC"/>
             </a:solidFill>
@@ -4596,11 +4604,11 @@
           </a:fontRef>
         </p:style>
         <p:txBody>
-          <a:bodyPr rtlCol="0" anchor="ctr" wrap="square" lIns="256032" rIns="256032" tIns="201168" bIns="182880"/>
+          <a:bodyPr rtlCol="0" anchor="ctr" wrap="square" lIns="256032" rIns="256032" tIns="219456" bIns="182880"/>
           <a:lstStyle/>
           <a:p>
             <a:pPr algn="ctr">
-              <a:defRPr sz="2000" b="1">
+              <a:defRPr sz="1800" b="1">
                 <a:solidFill>
                   <a:srgbClr val="C084FC"/>
                 </a:solidFill>
@@ -4630,9 +4638,9 @@
           <a:p>
             <a:pPr>
               <a:spcBef>
-                <a:spcPts val="600"/>
-              </a:spcBef>
-              <a:defRPr sz="1120">
+                <a:spcPts val="800"/>
+              </a:spcBef>
+              <a:defRPr sz="1100">
                 <a:solidFill>
                   <a:srgbClr val="94A3B8"/>
                 </a:solidFill>
@@ -4646,9 +4654,9 @@
           <a:p>
             <a:pPr>
               <a:spcBef>
-                <a:spcPts val="600"/>
-              </a:spcBef>
-              <a:defRPr sz="1120">
+                <a:spcPts val="800"/>
+              </a:spcBef>
+              <a:defRPr sz="1100">
                 <a:solidFill>
                   <a:srgbClr val="94A3B8"/>
                 </a:solidFill>
@@ -4662,9 +4670,9 @@
           <a:p>
             <a:pPr>
               <a:spcBef>
-                <a:spcPts val="600"/>
-              </a:spcBef>
-              <a:defRPr sz="1120">
+                <a:spcPts val="800"/>
+              </a:spcBef>
+              <a:defRPr sz="1100">
                 <a:solidFill>
                   <a:srgbClr val="94A3B8"/>
                 </a:solidFill>
@@ -4678,9 +4686,9 @@
           <a:p>
             <a:pPr>
               <a:spcBef>
-                <a:spcPts val="600"/>
-              </a:spcBef>
-              <a:defRPr sz="1120">
+                <a:spcPts val="800"/>
+              </a:spcBef>
+              <a:defRPr sz="1100">
                 <a:solidFill>
                   <a:srgbClr val="94A3B8"/>
                 </a:solidFill>
@@ -4701,11 +4709,13 @@
         </p:nvSpPr>
         <p:spPr>
           <a:xfrm>
-            <a:off x="1645920" y="6016752"/>
-            <a:ext cx="8899855" cy="438912"/>
+            <a:off x="1645920" y="6327648"/>
+            <a:ext cx="8899855" cy="365760"/>
           </a:xfrm>
           <a:prstGeom prst="roundRect">
-            <a:avLst/>
+            <a:avLst>
+              <a:gd name="adj" fmla="val 50000"/>
+            </a:avLst>
           </a:prstGeom>
           <a:solidFill>
             <a:srgbClr val="120E20"/>
@@ -4735,7 +4745,7 @@
           <a:lstStyle/>
           <a:p>
             <a:pPr algn="ctr">
-              <a:defRPr sz="1100">
+              <a:defRPr sz="1050">
                 <a:solidFill>
                   <a:srgbClr val="94A3B8"/>
                 </a:solidFill>
@@ -4818,15 +4828,17 @@
         <p:spPr>
           <a:xfrm>
             <a:off x="731520" y="292608"/>
-            <a:ext cx="2221992" cy="292608"/>
+            <a:ext cx="2221992" cy="274320"/>
           </a:xfrm>
           <a:prstGeom prst="roundRect">
-            <a:avLst/>
+            <a:avLst>
+              <a:gd name="adj" fmla="val 50000"/>
+            </a:avLst>
           </a:prstGeom>
           <a:solidFill>
             <a:srgbClr val="120E20"/>
           </a:solidFill>
-          <a:ln w="15240">
+          <a:ln w="12700">
             <a:solidFill>
               <a:srgbClr val="A855F7"/>
             </a:solidFill>
@@ -4851,7 +4863,7 @@
           <a:lstStyle/>
           <a:p>
             <a:pPr algn="ctr">
-              <a:defRPr sz="950" b="1">
+              <a:defRPr sz="850" b="1">
                 <a:solidFill>
                   <a:srgbClr val="C084FC"/>
                 </a:solidFill>
@@ -4928,7 +4940,9 @@
             <a:ext cx="3332073" cy="4846320"/>
           </a:xfrm>
           <a:prstGeom prst="roundRect">
-            <a:avLst/>
+            <a:avLst>
+              <a:gd name="adj" fmla="val 5000"/>
+            </a:avLst>
           </a:prstGeom>
           <a:solidFill>
             <a:srgbClr val="120E20"/>
@@ -5063,7 +5077,9 @@
             <a:ext cx="3332073" cy="4846320"/>
           </a:xfrm>
           <a:prstGeom prst="roundRect">
-            <a:avLst/>
+            <a:avLst>
+              <a:gd name="adj" fmla="val 5000"/>
+            </a:avLst>
           </a:prstGeom>
           <a:solidFill>
             <a:srgbClr val="120E20"/>
@@ -5198,7 +5214,9 @@
             <a:ext cx="3332073" cy="4846320"/>
           </a:xfrm>
           <a:prstGeom prst="roundRect">
-            <a:avLst/>
+            <a:avLst>
+              <a:gd name="adj" fmla="val 5000"/>
+            </a:avLst>
           </a:prstGeom>
           <a:solidFill>
             <a:srgbClr val="120E20"/>
@@ -5391,15 +5409,17 @@
         <p:spPr>
           <a:xfrm>
             <a:off x="731520" y="292608"/>
-            <a:ext cx="2423160" cy="292608"/>
+            <a:ext cx="2423160" cy="274320"/>
           </a:xfrm>
           <a:prstGeom prst="roundRect">
-            <a:avLst/>
+            <a:avLst>
+              <a:gd name="adj" fmla="val 50000"/>
+            </a:avLst>
           </a:prstGeom>
           <a:solidFill>
             <a:srgbClr val="120E20"/>
           </a:solidFill>
-          <a:ln w="15240">
+          <a:ln w="12700">
             <a:solidFill>
               <a:srgbClr val="A855F7"/>
             </a:solidFill>
@@ -5424,7 +5444,7 @@
           <a:lstStyle/>
           <a:p>
             <a:pPr algn="ctr">
-              <a:defRPr sz="950" b="1">
+              <a:defRPr sz="850" b="1">
                 <a:solidFill>
                   <a:srgbClr val="C084FC"/>
                 </a:solidFill>
@@ -5501,7 +5521,9 @@
             <a:ext cx="10728655" cy="987552"/>
           </a:xfrm>
           <a:prstGeom prst="roundRect">
-            <a:avLst/>
+            <a:avLst>
+              <a:gd name="adj" fmla="val 5000"/>
+            </a:avLst>
           </a:prstGeom>
           <a:solidFill>
             <a:srgbClr val="120E20"/>
@@ -5572,7 +5594,9 @@
             <a:ext cx="10728655" cy="987552"/>
           </a:xfrm>
           <a:prstGeom prst="roundRect">
-            <a:avLst/>
+            <a:avLst>
+              <a:gd name="adj" fmla="val 5000"/>
+            </a:avLst>
           </a:prstGeom>
           <a:solidFill>
             <a:srgbClr val="120E20"/>
@@ -5643,7 +5667,9 @@
             <a:ext cx="10728655" cy="987552"/>
           </a:xfrm>
           <a:prstGeom prst="roundRect">
-            <a:avLst/>
+            <a:avLst>
+              <a:gd name="adj" fmla="val 5000"/>
+            </a:avLst>
           </a:prstGeom>
           <a:solidFill>
             <a:srgbClr val="120E20"/>
@@ -5714,7 +5740,9 @@
             <a:ext cx="10728655" cy="1444752"/>
           </a:xfrm>
           <a:prstGeom prst="roundRect">
-            <a:avLst/>
+            <a:avLst>
+              <a:gd name="adj" fmla="val 5000"/>
+            </a:avLst>
           </a:prstGeom>
           <a:solidFill>
             <a:srgbClr val="120E20"/>
@@ -5740,7 +5768,7 @@
           </a:fontRef>
         </p:style>
         <p:txBody>
-          <a:bodyPr rtlCol="0" anchor="ctr" wrap="square"/>
+          <a:bodyPr rtlCol="0" anchor="ctr" wrap="square" lIns="256032" rIns="256032" tIns="219456" bIns="182880"/>
           <a:lstStyle/>
           <a:p>
             <a:pPr algn="ctr">
@@ -5843,15 +5871,17 @@
         <p:spPr>
           <a:xfrm>
             <a:off x="731520" y="292608"/>
-            <a:ext cx="2624328" cy="292608"/>
+            <a:ext cx="2624328" cy="274320"/>
           </a:xfrm>
           <a:prstGeom prst="roundRect">
-            <a:avLst/>
+            <a:avLst>
+              <a:gd name="adj" fmla="val 50000"/>
+            </a:avLst>
           </a:prstGeom>
           <a:solidFill>
             <a:srgbClr val="120E20"/>
           </a:solidFill>
-          <a:ln w="15240">
+          <a:ln w="12700">
             <a:solidFill>
               <a:srgbClr val="A855F7"/>
             </a:solidFill>
@@ -5876,7 +5906,7 @@
           <a:lstStyle/>
           <a:p>
             <a:pPr algn="ctr">
-              <a:defRPr sz="950" b="1">
+              <a:defRPr sz="850" b="1">
                 <a:solidFill>
                   <a:srgbClr val="C084FC"/>
                 </a:solidFill>
@@ -5953,7 +5983,9 @@
             <a:ext cx="5166360" cy="4846320"/>
           </a:xfrm>
           <a:prstGeom prst="roundRect">
-            <a:avLst/>
+            <a:avLst>
+              <a:gd name="adj" fmla="val 5000"/>
+            </a:avLst>
           </a:prstGeom>
           <a:solidFill>
             <a:srgbClr val="120E20"/>
@@ -5997,9 +6029,9 @@
           <a:p>
             <a:pPr>
               <a:spcBef>
-                <a:spcPts val="1100"/>
-              </a:spcBef>
-              <a:defRPr b="1" sz="1200">
+                <a:spcPts val="1000"/>
+              </a:spcBef>
+              <a:defRPr b="1" sz="1100">
                 <a:solidFill>
                   <a:srgbClr val="F8FAFC"/>
                 </a:solidFill>
@@ -6015,7 +6047,7 @@
               <a:spcBef>
                 <a:spcPts val="200"/>
               </a:spcBef>
-              <a:defRPr sz="1050">
+              <a:defRPr sz="980">
                 <a:solidFill>
                   <a:srgbClr val="94A3B8"/>
                 </a:solidFill>
@@ -6029,9 +6061,9 @@
           <a:p>
             <a:pPr>
               <a:spcBef>
-                <a:spcPts val="1100"/>
-              </a:spcBef>
-              <a:defRPr b="1" sz="1200">
+                <a:spcPts val="1000"/>
+              </a:spcBef>
+              <a:defRPr b="1" sz="1100">
                 <a:solidFill>
                   <a:srgbClr val="F8FAFC"/>
                 </a:solidFill>
@@ -6047,7 +6079,7 @@
               <a:spcBef>
                 <a:spcPts val="200"/>
               </a:spcBef>
-              <a:defRPr sz="1050">
+              <a:defRPr sz="980">
                 <a:solidFill>
                   <a:srgbClr val="94A3B8"/>
                 </a:solidFill>
@@ -6061,9 +6093,9 @@
           <a:p>
             <a:pPr>
               <a:spcBef>
-                <a:spcPts val="1100"/>
-              </a:spcBef>
-              <a:defRPr b="1" sz="1200">
+                <a:spcPts val="1000"/>
+              </a:spcBef>
+              <a:defRPr b="1" sz="1100">
                 <a:solidFill>
                   <a:srgbClr val="F8FAFC"/>
                 </a:solidFill>
@@ -6079,7 +6111,7 @@
               <a:spcBef>
                 <a:spcPts val="200"/>
               </a:spcBef>
-              <a:defRPr sz="1050">
+              <a:defRPr sz="980">
                 <a:solidFill>
                   <a:srgbClr val="94A3B8"/>
                 </a:solidFill>
@@ -6093,9 +6125,9 @@
           <a:p>
             <a:pPr>
               <a:spcBef>
-                <a:spcPts val="1100"/>
-              </a:spcBef>
-              <a:defRPr b="1" sz="1200">
+                <a:spcPts val="1000"/>
+              </a:spcBef>
+              <a:defRPr b="1" sz="1100">
                 <a:solidFill>
                   <a:srgbClr val="F8FAFC"/>
                 </a:solidFill>
@@ -6111,7 +6143,7 @@
               <a:spcBef>
                 <a:spcPts val="200"/>
               </a:spcBef>
-              <a:defRPr sz="1050">
+              <a:defRPr sz="980">
                 <a:solidFill>
                   <a:srgbClr val="94A3B8"/>
                 </a:solidFill>
@@ -6136,7 +6168,9 @@
             <a:ext cx="5166360" cy="4846320"/>
           </a:xfrm>
           <a:prstGeom prst="roundRect">
-            <a:avLst/>
+            <a:avLst>
+              <a:gd name="adj" fmla="val 5000"/>
+            </a:avLst>
           </a:prstGeom>
           <a:solidFill>
             <a:srgbClr val="120E20"/>
@@ -6180,9 +6214,9 @@
           <a:p>
             <a:pPr>
               <a:spcBef>
-                <a:spcPts val="1100"/>
-              </a:spcBef>
-              <a:defRPr b="1" sz="1200">
+                <a:spcPts val="1000"/>
+              </a:spcBef>
+              <a:defRPr b="1" sz="1100">
                 <a:solidFill>
                   <a:srgbClr val="F8FAFC"/>
                 </a:solidFill>
@@ -6198,7 +6232,7 @@
               <a:spcBef>
                 <a:spcPts val="200"/>
               </a:spcBef>
-              <a:defRPr sz="1050">
+              <a:defRPr sz="980">
                 <a:solidFill>
                   <a:srgbClr val="94A3B8"/>
                 </a:solidFill>
@@ -6212,9 +6246,9 @@
           <a:p>
             <a:pPr>
               <a:spcBef>
-                <a:spcPts val="1100"/>
-              </a:spcBef>
-              <a:defRPr b="1" sz="1200">
+                <a:spcPts val="1000"/>
+              </a:spcBef>
+              <a:defRPr b="1" sz="1100">
                 <a:solidFill>
                   <a:srgbClr val="F8FAFC"/>
                 </a:solidFill>
@@ -6230,7 +6264,7 @@
               <a:spcBef>
                 <a:spcPts val="200"/>
               </a:spcBef>
-              <a:defRPr sz="1050">
+              <a:defRPr sz="980">
                 <a:solidFill>
                   <a:srgbClr val="94A3B8"/>
                 </a:solidFill>
@@ -6244,9 +6278,9 @@
           <a:p>
             <a:pPr>
               <a:spcBef>
-                <a:spcPts val="1100"/>
-              </a:spcBef>
-              <a:defRPr b="1" sz="1200">
+                <a:spcPts val="1000"/>
+              </a:spcBef>
+              <a:defRPr b="1" sz="1100">
                 <a:solidFill>
                   <a:srgbClr val="F8FAFC"/>
                 </a:solidFill>
@@ -6262,7 +6296,7 @@
               <a:spcBef>
                 <a:spcPts val="200"/>
               </a:spcBef>
-              <a:defRPr sz="1050">
+              <a:defRPr sz="980">
                 <a:solidFill>
                   <a:srgbClr val="94A3B8"/>
                 </a:solidFill>
@@ -6276,9 +6310,9 @@
           <a:p>
             <a:pPr>
               <a:spcBef>
-                <a:spcPts val="1100"/>
-              </a:spcBef>
-              <a:defRPr b="1" sz="1200">
+                <a:spcPts val="1000"/>
+              </a:spcBef>
+              <a:defRPr b="1" sz="1100">
                 <a:solidFill>
                   <a:srgbClr val="F8FAFC"/>
                 </a:solidFill>
@@ -6294,7 +6328,7 @@
               <a:spcBef>
                 <a:spcPts val="200"/>
               </a:spcBef>
-              <a:defRPr sz="1050">
+              <a:defRPr sz="980">
                 <a:solidFill>
                   <a:srgbClr val="94A3B8"/>
                 </a:solidFill>
@@ -6377,15 +6411,17 @@
         <p:spPr>
           <a:xfrm>
             <a:off x="731520" y="292608"/>
-            <a:ext cx="2221992" cy="292608"/>
+            <a:ext cx="2221992" cy="274320"/>
           </a:xfrm>
           <a:prstGeom prst="roundRect">
-            <a:avLst/>
+            <a:avLst>
+              <a:gd name="adj" fmla="val 50000"/>
+            </a:avLst>
           </a:prstGeom>
           <a:solidFill>
             <a:srgbClr val="120E20"/>
           </a:solidFill>
-          <a:ln w="15240">
+          <a:ln w="12700">
             <a:solidFill>
               <a:srgbClr val="A855F7"/>
             </a:solidFill>
@@ -6410,7 +6446,7 @@
           <a:lstStyle/>
           <a:p>
             <a:pPr algn="ctr">
-              <a:defRPr sz="950" b="1">
+              <a:defRPr sz="850" b="1">
                 <a:solidFill>
                   <a:srgbClr val="C084FC"/>
                 </a:solidFill>
@@ -6484,10 +6520,12 @@
         <p:spPr>
           <a:xfrm>
             <a:off x="731520" y="1536192"/>
-            <a:ext cx="4754880" cy="4846320"/>
+            <a:ext cx="5166360" cy="4846320"/>
           </a:xfrm>
           <a:prstGeom prst="roundRect">
-            <a:avLst/>
+            <a:avLst>
+              <a:gd name="adj" fmla="val 5000"/>
+            </a:avLst>
           </a:prstGeom>
           <a:solidFill>
             <a:srgbClr val="120E20"/>
@@ -6513,11 +6551,11 @@
           </a:fontRef>
         </p:style>
         <p:txBody>
-          <a:bodyPr rtlCol="0" anchor="ctr" wrap="square" lIns="219456" rIns="219456" tIns="201168" bIns="164592"/>
+          <a:bodyPr rtlCol="0" anchor="ctr" wrap="square" lIns="256032" rIns="256032" tIns="219456" bIns="182880"/>
           <a:lstStyle/>
           <a:p>
             <a:pPr algn="ctr">
-              <a:defRPr sz="1450" b="1">
+              <a:defRPr sz="1500" b="1">
                 <a:solidFill>
                   <a:srgbClr val="38BDF8"/>
                 </a:solidFill>
@@ -6533,7 +6571,7 @@
               <a:spcBef>
                 <a:spcPts val="800"/>
               </a:spcBef>
-              <a:defRPr b="1" sz="1150">
+              <a:defRPr b="1" sz="1100">
                 <a:solidFill>
                   <a:srgbClr val="F8FAFC"/>
                 </a:solidFill>
@@ -6549,7 +6587,7 @@
               <a:spcBef>
                 <a:spcPts val="200"/>
               </a:spcBef>
-              <a:defRPr sz="980">
+              <a:defRPr sz="950">
                 <a:solidFill>
                   <a:srgbClr val="94A3B8"/>
                 </a:solidFill>
@@ -6565,7 +6603,7 @@
               <a:spcBef>
                 <a:spcPts val="200"/>
               </a:spcBef>
-              <a:defRPr sz="980">
+              <a:defRPr sz="950">
                 <a:solidFill>
                   <a:srgbClr val="94A3B8"/>
                 </a:solidFill>
@@ -6581,7 +6619,7 @@
               <a:spcBef>
                 <a:spcPts val="200"/>
               </a:spcBef>
-              <a:defRPr sz="980">
+              <a:defRPr sz="950">
                 <a:solidFill>
                   <a:srgbClr val="94A3B8"/>
                 </a:solidFill>
@@ -6597,7 +6635,7 @@
               <a:spcBef>
                 <a:spcPts val="200"/>
               </a:spcBef>
-              <a:defRPr sz="980">
+              <a:defRPr sz="950">
                 <a:solidFill>
                   <a:srgbClr val="94A3B8"/>
                 </a:solidFill>
@@ -6613,7 +6651,7 @@
               <a:spcBef>
                 <a:spcPts val="800"/>
               </a:spcBef>
-              <a:defRPr b="1" sz="1150">
+              <a:defRPr b="1" sz="1100">
                 <a:solidFill>
                   <a:srgbClr val="F8FAFC"/>
                 </a:solidFill>
@@ -6629,7 +6667,7 @@
               <a:spcBef>
                 <a:spcPts val="200"/>
               </a:spcBef>
-              <a:defRPr sz="980">
+              <a:defRPr sz="950">
                 <a:solidFill>
                   <a:srgbClr val="94A3B8"/>
                 </a:solidFill>
@@ -6645,7 +6683,7 @@
               <a:spcBef>
                 <a:spcPts val="200"/>
               </a:spcBef>
-              <a:defRPr sz="980">
+              <a:defRPr sz="950">
                 <a:solidFill>
                   <a:srgbClr val="94A3B8"/>
                 </a:solidFill>
@@ -6661,7 +6699,7 @@
               <a:spcBef>
                 <a:spcPts val="800"/>
               </a:spcBef>
-              <a:defRPr b="1" sz="1150">
+              <a:defRPr b="1" sz="1100">
                 <a:solidFill>
                   <a:srgbClr val="F8FAFC"/>
                 </a:solidFill>
@@ -6677,7 +6715,7 @@
               <a:spcBef>
                 <a:spcPts val="200"/>
               </a:spcBef>
-              <a:defRPr sz="980">
+              <a:defRPr sz="950">
                 <a:solidFill>
                   <a:srgbClr val="94A3B8"/>
                 </a:solidFill>
@@ -6693,7 +6731,7 @@
               <a:spcBef>
                 <a:spcPts val="200"/>
               </a:spcBef>
-              <a:defRPr sz="980">
+              <a:defRPr sz="950">
                 <a:solidFill>
                   <a:srgbClr val="94A3B8"/>
                 </a:solidFill>
@@ -6714,14 +6752,16 @@
         </p:nvSpPr>
         <p:spPr>
           <a:xfrm>
-            <a:off x="5715000" y="1536192"/>
-            <a:ext cx="5745175" cy="4846320"/>
+            <a:off x="6293815" y="1536192"/>
+            <a:ext cx="5166360" cy="4846320"/>
           </a:xfrm>
           <a:prstGeom prst="roundRect">
-            <a:avLst/>
+            <a:avLst>
+              <a:gd name="adj" fmla="val 5000"/>
+            </a:avLst>
           </a:prstGeom>
           <a:solidFill>
-            <a:srgbClr val="0C0A18"/>
+            <a:srgbClr val="120E20"/>
           </a:solidFill>
           <a:ln w="19050">
             <a:solidFill>
@@ -6744,7 +6784,7 @@
           </a:fontRef>
         </p:style>
         <p:txBody>
-          <a:bodyPr rtlCol="0" anchor="ctr"/>
+          <a:bodyPr rtlCol="0" anchor="ctr" wrap="square" lIns="256032" rIns="256032" tIns="219456" bIns="182880"/>
           <a:lstStyle/>
           <a:p>
             <a:pPr algn="ctr"/>
@@ -6759,16 +6799,18 @@
         </p:nvSpPr>
         <p:spPr>
           <a:xfrm>
-            <a:off x="6850227" y="1719072"/>
-            <a:ext cx="3474720" cy="402336"/>
+            <a:off x="7231075" y="1719072"/>
+            <a:ext cx="3291840" cy="402336"/>
           </a:xfrm>
           <a:prstGeom prst="roundRect">
-            <a:avLst/>
+            <a:avLst>
+              <a:gd name="adj" fmla="val 5000"/>
+            </a:avLst>
           </a:prstGeom>
           <a:solidFill>
             <a:srgbClr val="F1F5F9"/>
           </a:solidFill>
-          <a:ln w="15240">
+          <a:ln w="12700">
             <a:solidFill>
               <a:srgbClr val="94A3B8"/>
             </a:solidFill>
@@ -6814,7 +6856,7 @@
         </p:nvSpPr>
         <p:spPr>
           <a:xfrm>
-            <a:off x="8404707" y="2139696"/>
+            <a:off x="8694115" y="2139696"/>
             <a:ext cx="365760" cy="219456"/>
           </a:xfrm>
           <a:prstGeom prst="rect">
@@ -6850,16 +6892,18 @@
         </p:nvSpPr>
         <p:spPr>
           <a:xfrm>
-            <a:off x="6850227" y="2395728"/>
-            <a:ext cx="3474720" cy="402336"/>
+            <a:off x="7231075" y="2395728"/>
+            <a:ext cx="3291840" cy="402336"/>
           </a:xfrm>
           <a:prstGeom prst="roundRect">
-            <a:avLst/>
+            <a:avLst>
+              <a:gd name="adj" fmla="val 5000"/>
+            </a:avLst>
           </a:prstGeom>
           <a:solidFill>
             <a:srgbClr val="F1F5F9"/>
           </a:solidFill>
-          <a:ln w="15240">
+          <a:ln w="12700">
             <a:solidFill>
               <a:srgbClr val="94A3B8"/>
             </a:solidFill>
@@ -6905,7 +6949,7 @@
         </p:nvSpPr>
         <p:spPr>
           <a:xfrm>
-            <a:off x="8404707" y="2816352"/>
+            <a:off x="8694115" y="2816352"/>
             <a:ext cx="365760" cy="219456"/>
           </a:xfrm>
           <a:prstGeom prst="rect">
@@ -6941,16 +6985,18 @@
         </p:nvSpPr>
         <p:spPr>
           <a:xfrm>
-            <a:off x="5926683" y="3072384"/>
-            <a:ext cx="1261872" cy="868680"/>
+            <a:off x="6536131" y="3072384"/>
+            <a:ext cx="1115568" cy="868680"/>
           </a:xfrm>
           <a:prstGeom prst="roundRect">
-            <a:avLst/>
+            <a:avLst>
+              <a:gd name="adj" fmla="val 5000"/>
+            </a:avLst>
           </a:prstGeom>
           <a:solidFill>
             <a:srgbClr val="F8FAFC"/>
           </a:solidFill>
-          <a:ln w="15240">
+          <a:ln w="12700">
             <a:solidFill>
               <a:srgbClr val="38BDF8"/>
             </a:solidFill>
@@ -6975,7 +7021,7 @@
           <a:lstStyle/>
           <a:p>
             <a:pPr algn="ctr">
-              <a:defRPr sz="950" b="1">
+              <a:defRPr sz="919" b="1">
                 <a:solidFill>
                   <a:srgbClr val="0284C7"/>
                 </a:solidFill>
@@ -6991,7 +7037,7 @@
               <a:spcBef>
                 <a:spcPts val="200"/>
               </a:spcBef>
-              <a:defRPr sz="850">
+              <a:defRPr b="0" sz="800">
                 <a:solidFill>
                   <a:srgbClr val="0F172A"/>
                 </a:solidFill>
@@ -7012,16 +7058,18 @@
         </p:nvSpPr>
         <p:spPr>
           <a:xfrm>
-            <a:off x="7279995" y="3072384"/>
-            <a:ext cx="1261872" cy="868680"/>
+            <a:off x="7724851" y="3072384"/>
+            <a:ext cx="1115568" cy="868680"/>
           </a:xfrm>
           <a:prstGeom prst="roundRect">
-            <a:avLst/>
+            <a:avLst>
+              <a:gd name="adj" fmla="val 5000"/>
+            </a:avLst>
           </a:prstGeom>
           <a:solidFill>
             <a:srgbClr val="F8FAFC"/>
           </a:solidFill>
-          <a:ln w="15240">
+          <a:ln w="12700">
             <a:solidFill>
               <a:srgbClr val="38BDF8"/>
             </a:solidFill>
@@ -7046,7 +7094,7 @@
           <a:lstStyle/>
           <a:p>
             <a:pPr algn="ctr">
-              <a:defRPr sz="950" b="1">
+              <a:defRPr sz="919" b="1">
                 <a:solidFill>
                   <a:srgbClr val="0284C7"/>
                 </a:solidFill>
@@ -7062,7 +7110,7 @@
               <a:spcBef>
                 <a:spcPts val="200"/>
               </a:spcBef>
-              <a:defRPr sz="850">
+              <a:defRPr b="0" sz="800">
                 <a:solidFill>
                   <a:srgbClr val="0F172A"/>
                 </a:solidFill>
@@ -7083,16 +7131,18 @@
         </p:nvSpPr>
         <p:spPr>
           <a:xfrm>
-            <a:off x="8633307" y="3072384"/>
-            <a:ext cx="1261872" cy="868680"/>
+            <a:off x="8913571" y="3072384"/>
+            <a:ext cx="1115568" cy="868680"/>
           </a:xfrm>
           <a:prstGeom prst="roundRect">
-            <a:avLst/>
+            <a:avLst>
+              <a:gd name="adj" fmla="val 5000"/>
+            </a:avLst>
           </a:prstGeom>
           <a:solidFill>
             <a:srgbClr val="F8FAFC"/>
           </a:solidFill>
-          <a:ln w="15240">
+          <a:ln w="12700">
             <a:solidFill>
               <a:srgbClr val="38BDF8"/>
             </a:solidFill>
@@ -7117,7 +7167,7 @@
           <a:lstStyle/>
           <a:p>
             <a:pPr algn="ctr">
-              <a:defRPr sz="950" b="1">
+              <a:defRPr sz="919" b="1">
                 <a:solidFill>
                   <a:srgbClr val="0284C7"/>
                 </a:solidFill>
@@ -7133,7 +7183,7 @@
               <a:spcBef>
                 <a:spcPts val="200"/>
               </a:spcBef>
-              <a:defRPr sz="850">
+              <a:defRPr b="0" sz="800">
                 <a:solidFill>
                   <a:srgbClr val="0F172A"/>
                 </a:solidFill>
@@ -7154,16 +7204,18 @@
         </p:nvSpPr>
         <p:spPr>
           <a:xfrm>
-            <a:off x="9986619" y="3072384"/>
-            <a:ext cx="1261872" cy="868680"/>
+            <a:off x="10102291" y="3072384"/>
+            <a:ext cx="1115568" cy="868680"/>
           </a:xfrm>
           <a:prstGeom prst="roundRect">
-            <a:avLst/>
+            <a:avLst>
+              <a:gd name="adj" fmla="val 5000"/>
+            </a:avLst>
           </a:prstGeom>
           <a:solidFill>
             <a:srgbClr val="FFF1F2"/>
           </a:solidFill>
-          <a:ln w="15240">
+          <a:ln w="12700">
             <a:solidFill>
               <a:srgbClr val="F43F5E"/>
             </a:solidFill>
@@ -7188,7 +7240,7 @@
           <a:lstStyle/>
           <a:p>
             <a:pPr algn="ctr">
-              <a:defRPr sz="950" b="1">
+              <a:defRPr sz="919" b="1">
                 <a:solidFill>
                   <a:srgbClr val="BE123C"/>
                 </a:solidFill>
@@ -7204,7 +7256,7 @@
               <a:spcBef>
                 <a:spcPts val="200"/>
               </a:spcBef>
-              <a:defRPr sz="850">
+              <a:defRPr b="0" sz="800">
                 <a:solidFill>
                   <a:srgbClr val="991B1B"/>
                 </a:solidFill>
@@ -7225,7 +7277,7 @@
         </p:nvSpPr>
         <p:spPr>
           <a:xfrm>
-            <a:off x="8404707" y="3959352"/>
+            <a:off x="8694115" y="3959352"/>
             <a:ext cx="365760" cy="219456"/>
           </a:xfrm>
           <a:prstGeom prst="rect">
@@ -7261,16 +7313,18 @@
         </p:nvSpPr>
         <p:spPr>
           <a:xfrm>
-            <a:off x="6072987" y="4224528"/>
-            <a:ext cx="5029200" cy="658368"/>
+            <a:off x="6536131" y="4224528"/>
+            <a:ext cx="4681728" cy="658368"/>
           </a:xfrm>
           <a:prstGeom prst="roundRect">
-            <a:avLst/>
+            <a:avLst>
+              <a:gd name="adj" fmla="val 5000"/>
+            </a:avLst>
           </a:prstGeom>
           <a:solidFill>
             <a:srgbClr val="FEF3C7"/>
           </a:solidFill>
-          <a:ln w="15240">
+          <a:ln w="12700">
             <a:solidFill>
               <a:srgbClr val="F59E0B"/>
             </a:solidFill>
@@ -7295,7 +7349,7 @@
           <a:lstStyle/>
           <a:p>
             <a:pPr algn="ctr">
-              <a:defRPr sz="1100" b="1">
+              <a:defRPr sz="1050" b="1">
                 <a:solidFill>
                   <a:srgbClr val="78350F"/>
                 </a:solidFill>
@@ -7311,7 +7365,7 @@
               <a:spcBef>
                 <a:spcPts val="200"/>
               </a:spcBef>
-              <a:defRPr sz="950">
+              <a:defRPr b="0" sz="900">
                 <a:solidFill>
                   <a:srgbClr val="92400E"/>
                 </a:solidFill>
@@ -7332,7 +7386,7 @@
         </p:nvSpPr>
         <p:spPr>
           <a:xfrm>
-            <a:off x="8404707" y="4901184"/>
+            <a:off x="8694115" y="4901184"/>
             <a:ext cx="365760" cy="219456"/>
           </a:xfrm>
           <a:prstGeom prst="rect">
@@ -7368,16 +7422,18 @@
         </p:nvSpPr>
         <p:spPr>
           <a:xfrm>
-            <a:off x="6004407" y="5157216"/>
-            <a:ext cx="2423160" cy="896112"/>
+            <a:off x="6536131" y="5157216"/>
+            <a:ext cx="2240280" cy="896112"/>
           </a:xfrm>
           <a:prstGeom prst="roundRect">
-            <a:avLst/>
+            <a:avLst>
+              <a:gd name="adj" fmla="val 5000"/>
+            </a:avLst>
           </a:prstGeom>
           <a:solidFill>
             <a:srgbClr val="DCFCE7"/>
           </a:solidFill>
-          <a:ln w="15240">
+          <a:ln w="12700">
             <a:solidFill>
               <a:srgbClr val="22C55E"/>
             </a:solidFill>
@@ -7402,7 +7458,7 @@
           <a:lstStyle/>
           <a:p>
             <a:pPr algn="ctr">
-              <a:defRPr sz="1100" b="1">
+              <a:defRPr sz="1050" b="1">
                 <a:solidFill>
                   <a:srgbClr val="14532D"/>
                 </a:solidFill>
@@ -7418,7 +7474,7 @@
               <a:spcBef>
                 <a:spcPts val="200"/>
               </a:spcBef>
-              <a:defRPr sz="950">
+              <a:defRPr b="0" sz="900">
                 <a:solidFill>
                   <a:srgbClr val="166534"/>
                 </a:solidFill>
@@ -7439,16 +7495,18 @@
         </p:nvSpPr>
         <p:spPr>
           <a:xfrm>
-            <a:off x="8747607" y="5157216"/>
-            <a:ext cx="2423160" cy="896112"/>
+            <a:off x="8977579" y="5157216"/>
+            <a:ext cx="2240280" cy="896112"/>
           </a:xfrm>
           <a:prstGeom prst="roundRect">
-            <a:avLst/>
+            <a:avLst>
+              <a:gd name="adj" fmla="val 5000"/>
+            </a:avLst>
           </a:prstGeom>
           <a:solidFill>
             <a:srgbClr val="FEE2E2"/>
           </a:solidFill>
-          <a:ln w="15240">
+          <a:ln w="12700">
             <a:solidFill>
               <a:srgbClr val="F43F5E"/>
             </a:solidFill>
@@ -7473,7 +7531,7 @@
           <a:lstStyle/>
           <a:p>
             <a:pPr algn="ctr">
-              <a:defRPr sz="1100" b="1">
+              <a:defRPr sz="1050" b="1">
                 <a:solidFill>
                   <a:srgbClr val="991B1B"/>
                 </a:solidFill>
@@ -7489,7 +7547,7 @@
               <a:spcBef>
                 <a:spcPts val="200"/>
               </a:spcBef>
-              <a:defRPr sz="950">
+              <a:defRPr b="0" sz="900">
                 <a:solidFill>
                   <a:srgbClr val="7F1D1D"/>
                 </a:solidFill>
@@ -7572,15 +7630,17 @@
         <p:spPr>
           <a:xfrm>
             <a:off x="731520" y="292608"/>
-            <a:ext cx="2020824" cy="292608"/>
+            <a:ext cx="2020824" cy="274320"/>
           </a:xfrm>
           <a:prstGeom prst="roundRect">
-            <a:avLst/>
+            <a:avLst>
+              <a:gd name="adj" fmla="val 50000"/>
+            </a:avLst>
           </a:prstGeom>
           <a:solidFill>
             <a:srgbClr val="120E20"/>
           </a:solidFill>
-          <a:ln w="15240">
+          <a:ln w="12700">
             <a:solidFill>
               <a:srgbClr val="A855F7"/>
             </a:solidFill>
@@ -7605,7 +7665,7 @@
           <a:lstStyle/>
           <a:p>
             <a:pPr algn="ctr">
-              <a:defRPr sz="950" b="1">
+              <a:defRPr sz="850" b="1">
                 <a:solidFill>
                   <a:srgbClr val="C084FC"/>
                 </a:solidFill>
@@ -7686,8 +7746,8 @@
         </p:blipFill>
         <p:spPr>
           <a:xfrm>
-            <a:off x="502920" y="1389888"/>
-            <a:ext cx="11185855" cy="5166360"/>
+            <a:off x="731520" y="1536192"/>
+            <a:ext cx="10728655" cy="4846320"/>
           </a:xfrm>
           <a:prstGeom prst="rect">
             <a:avLst/>
@@ -7764,15 +7824,17 @@
         <p:spPr>
           <a:xfrm>
             <a:off x="731520" y="292608"/>
-            <a:ext cx="2121408" cy="292608"/>
+            <a:ext cx="2121408" cy="274320"/>
           </a:xfrm>
           <a:prstGeom prst="roundRect">
-            <a:avLst/>
+            <a:avLst>
+              <a:gd name="adj" fmla="val 50000"/>
+            </a:avLst>
           </a:prstGeom>
           <a:solidFill>
             <a:srgbClr val="120E20"/>
           </a:solidFill>
-          <a:ln w="15240">
+          <a:ln w="12700">
             <a:solidFill>
               <a:srgbClr val="A855F7"/>
             </a:solidFill>
@@ -7797,7 +7859,7 @@
           <a:lstStyle/>
           <a:p>
             <a:pPr algn="ctr">
-              <a:defRPr sz="950" b="1">
+              <a:defRPr sz="850" b="1">
                 <a:solidFill>
                   <a:srgbClr val="C084FC"/>
                 </a:solidFill>
@@ -7871,10 +7933,12 @@
         <p:spPr>
           <a:xfrm>
             <a:off x="731520" y="1536192"/>
-            <a:ext cx="5852160" cy="4846320"/>
+            <a:ext cx="5166360" cy="4846320"/>
           </a:xfrm>
           <a:prstGeom prst="roundRect">
-            <a:avLst/>
+            <a:avLst>
+              <a:gd name="adj" fmla="val 5000"/>
+            </a:avLst>
           </a:prstGeom>
           <a:solidFill>
             <a:srgbClr val="120E20"/>
@@ -7900,7 +7964,7 @@
           </a:fontRef>
         </p:style>
         <p:txBody>
-          <a:bodyPr rtlCol="0" anchor="ctr"/>
+          <a:bodyPr rtlCol="0" anchor="ctr" wrap="square" lIns="256032" rIns="256032" tIns="219456" bIns="182880"/>
           <a:lstStyle/>
           <a:p>
             <a:pPr algn="ctr"/>
@@ -7915,8 +7979,8 @@
         </p:nvSpPr>
         <p:spPr>
           <a:xfrm>
-            <a:off x="914400" y="1600200"/>
-            <a:ext cx="5486400" cy="292608"/>
+            <a:off x="914400" y="1645920"/>
+            <a:ext cx="4800600" cy="310896"/>
           </a:xfrm>
           <a:prstGeom prst="rect">
             <a:avLst/>
@@ -7951,16 +8015,18 @@
         </p:nvSpPr>
         <p:spPr>
           <a:xfrm>
-            <a:off x="960120" y="1956816"/>
-            <a:ext cx="5394960" cy="438912"/>
+            <a:off x="914400" y="2011680"/>
+            <a:ext cx="4800600" cy="438912"/>
           </a:xfrm>
           <a:prstGeom prst="roundRect">
-            <a:avLst/>
+            <a:avLst>
+              <a:gd name="adj" fmla="val 5000"/>
+            </a:avLst>
           </a:prstGeom>
           <a:solidFill>
             <a:srgbClr val="1E1B4B"/>
           </a:solidFill>
-          <a:ln w="15240">
+          <a:ln w="12700">
             <a:solidFill>
               <a:srgbClr val="818CF8"/>
             </a:solidFill>
@@ -8001,7 +8067,7 @@
               <a:spcBef>
                 <a:spcPts val="200"/>
               </a:spcBef>
-              <a:defRPr sz="800">
+              <a:defRPr b="0" sz="800">
                 <a:solidFill>
                   <a:srgbClr val="94A3B8"/>
                 </a:solidFill>
@@ -8022,7 +8088,7 @@
         </p:nvSpPr>
         <p:spPr>
           <a:xfrm>
-            <a:off x="3474720" y="2414016"/>
+            <a:off x="3131820" y="2468880"/>
             <a:ext cx="365760" cy="219456"/>
           </a:xfrm>
           <a:prstGeom prst="rect">
@@ -8058,16 +8124,18 @@
         </p:nvSpPr>
         <p:spPr>
           <a:xfrm>
-            <a:off x="960120" y="2651760"/>
-            <a:ext cx="5394960" cy="438912"/>
+            <a:off x="914400" y="2706624"/>
+            <a:ext cx="4800600" cy="438912"/>
           </a:xfrm>
           <a:prstGeom prst="roundRect">
-            <a:avLst/>
+            <a:avLst>
+              <a:gd name="adj" fmla="val 5000"/>
+            </a:avLst>
           </a:prstGeom>
           <a:solidFill>
             <a:srgbClr val="4C0519"/>
           </a:solidFill>
-          <a:ln w="15240">
+          <a:ln w="12700">
             <a:solidFill>
               <a:srgbClr val="F43F5E"/>
             </a:solidFill>
@@ -8108,7 +8176,7 @@
               <a:spcBef>
                 <a:spcPts val="200"/>
               </a:spcBef>
-              <a:defRPr sz="800">
+              <a:defRPr b="0" sz="800">
                 <a:solidFill>
                   <a:srgbClr val="94A3B8"/>
                 </a:solidFill>
@@ -8129,7 +8197,7 @@
         </p:nvSpPr>
         <p:spPr>
           <a:xfrm>
-            <a:off x="3474720" y="3108960"/>
+            <a:off x="3131820" y="3163824"/>
             <a:ext cx="365760" cy="219456"/>
           </a:xfrm>
           <a:prstGeom prst="rect">
@@ -8165,16 +8233,18 @@
         </p:nvSpPr>
         <p:spPr>
           <a:xfrm>
-            <a:off x="960120" y="3346704"/>
-            <a:ext cx="5394960" cy="438912"/>
+            <a:off x="914400" y="3401568"/>
+            <a:ext cx="4800600" cy="438912"/>
           </a:xfrm>
           <a:prstGeom prst="roundRect">
-            <a:avLst/>
+            <a:avLst>
+              <a:gd name="adj" fmla="val 5000"/>
+            </a:avLst>
           </a:prstGeom>
           <a:solidFill>
             <a:srgbClr val="4C0519"/>
           </a:solidFill>
-          <a:ln w="15240">
+          <a:ln w="12700">
             <a:solidFill>
               <a:srgbClr val="F43F5E"/>
             </a:solidFill>
@@ -8215,7 +8285,7 @@
               <a:spcBef>
                 <a:spcPts val="200"/>
               </a:spcBef>
-              <a:defRPr sz="800">
+              <a:defRPr b="0" sz="800">
                 <a:solidFill>
                   <a:srgbClr val="94A3B8"/>
                 </a:solidFill>
@@ -8236,7 +8306,7 @@
         </p:nvSpPr>
         <p:spPr>
           <a:xfrm>
-            <a:off x="3474720" y="3803904"/>
+            <a:off x="3131820" y="3858768"/>
             <a:ext cx="365760" cy="219456"/>
           </a:xfrm>
           <a:prstGeom prst="rect">
@@ -8272,16 +8342,18 @@
         </p:nvSpPr>
         <p:spPr>
           <a:xfrm>
-            <a:off x="960120" y="4041648"/>
-            <a:ext cx="5394960" cy="438912"/>
+            <a:off x="914400" y="4096512"/>
+            <a:ext cx="4800600" cy="438912"/>
           </a:xfrm>
           <a:prstGeom prst="roundRect">
-            <a:avLst/>
+            <a:avLst>
+              <a:gd name="adj" fmla="val 5000"/>
+            </a:avLst>
           </a:prstGeom>
           <a:solidFill>
             <a:srgbClr val="0F172A"/>
           </a:solidFill>
-          <a:ln w="15240">
+          <a:ln w="12700">
             <a:solidFill>
               <a:srgbClr val="38BDF8"/>
             </a:solidFill>
@@ -8322,7 +8394,7 @@
               <a:spcBef>
                 <a:spcPts val="200"/>
               </a:spcBef>
-              <a:defRPr sz="800">
+              <a:defRPr b="0" sz="800">
                 <a:solidFill>
                   <a:srgbClr val="94A3B8"/>
                 </a:solidFill>
@@ -8343,7 +8415,7 @@
         </p:nvSpPr>
         <p:spPr>
           <a:xfrm>
-            <a:off x="3474720" y="4498848"/>
+            <a:off x="3131820" y="4553712"/>
             <a:ext cx="365760" cy="219456"/>
           </a:xfrm>
           <a:prstGeom prst="rect">
@@ -8379,16 +8451,18 @@
         </p:nvSpPr>
         <p:spPr>
           <a:xfrm>
-            <a:off x="960120" y="4736592"/>
-            <a:ext cx="5394960" cy="438912"/>
+            <a:off x="914400" y="4791456"/>
+            <a:ext cx="4800600" cy="438912"/>
           </a:xfrm>
           <a:prstGeom prst="roundRect">
-            <a:avLst/>
+            <a:avLst>
+              <a:gd name="adj" fmla="val 5000"/>
+            </a:avLst>
           </a:prstGeom>
           <a:solidFill>
             <a:srgbClr val="4C0519"/>
           </a:solidFill>
-          <a:ln w="15240">
+          <a:ln w="12700">
             <a:solidFill>
               <a:srgbClr val="F43F5E"/>
             </a:solidFill>
@@ -8429,7 +8503,7 @@
               <a:spcBef>
                 <a:spcPts val="200"/>
               </a:spcBef>
-              <a:defRPr sz="800">
+              <a:defRPr b="0" sz="800">
                 <a:solidFill>
                   <a:srgbClr val="94A3B8"/>
                 </a:solidFill>
@@ -8450,7 +8524,7 @@
         </p:nvSpPr>
         <p:spPr>
           <a:xfrm>
-            <a:off x="3474720" y="5193792"/>
+            <a:off x="3131820" y="5248656"/>
             <a:ext cx="365760" cy="219456"/>
           </a:xfrm>
           <a:prstGeom prst="rect">
@@ -8486,16 +8560,18 @@
         </p:nvSpPr>
         <p:spPr>
           <a:xfrm>
-            <a:off x="960120" y="5431536"/>
-            <a:ext cx="5394960" cy="438912"/>
+            <a:off x="914400" y="5486400"/>
+            <a:ext cx="4800600" cy="438912"/>
           </a:xfrm>
           <a:prstGeom prst="roundRect">
-            <a:avLst/>
+            <a:avLst>
+              <a:gd name="adj" fmla="val 5000"/>
+            </a:avLst>
           </a:prstGeom>
           <a:solidFill>
             <a:srgbClr val="0F172A"/>
           </a:solidFill>
-          <a:ln w="15240">
+          <a:ln w="12700">
             <a:solidFill>
               <a:srgbClr val="F59E0B"/>
             </a:solidFill>
@@ -8536,7 +8612,7 @@
               <a:spcBef>
                 <a:spcPts val="200"/>
               </a:spcBef>
-              <a:defRPr sz="800">
+              <a:defRPr b="0" sz="800">
                 <a:solidFill>
                   <a:srgbClr val="94A3B8"/>
                 </a:solidFill>
@@ -8557,16 +8633,18 @@
         </p:nvSpPr>
         <p:spPr>
           <a:xfrm>
-            <a:off x="6903720" y="1536192"/>
-            <a:ext cx="4556455" cy="1097280"/>
+            <a:off x="6293815" y="1536192"/>
+            <a:ext cx="5166360" cy="1078992"/>
           </a:xfrm>
           <a:prstGeom prst="roundRect">
-            <a:avLst/>
+            <a:avLst>
+              <a:gd name="adj" fmla="val 5000"/>
+            </a:avLst>
           </a:prstGeom>
           <a:solidFill>
-            <a:srgbClr val="0F172A"/>
+            <a:srgbClr val="120E20"/>
           </a:solidFill>
-          <a:ln w="15240">
+          <a:ln w="19050">
             <a:solidFill>
               <a:srgbClr val="F59E0B"/>
             </a:solidFill>
@@ -8587,7 +8665,7 @@
           </a:fontRef>
         </p:style>
         <p:txBody>
-          <a:bodyPr rtlCol="0" anchor="ctr" wrap="square" lIns="182880" rIns="182880" tIns="109728" bIns="91440"/>
+          <a:bodyPr rtlCol="0" anchor="ctr" wrap="square" lIns="219456" rIns="219456" tIns="109728" bIns="91440"/>
           <a:lstStyle/>
           <a:p>
             <a:pPr algn="ctr">
@@ -8628,16 +8706,18 @@
         </p:nvSpPr>
         <p:spPr>
           <a:xfrm>
-            <a:off x="6903720" y="2779776"/>
-            <a:ext cx="4556455" cy="1097280"/>
+            <a:off x="6293815" y="2788920"/>
+            <a:ext cx="5166360" cy="1078992"/>
           </a:xfrm>
           <a:prstGeom prst="roundRect">
-            <a:avLst/>
+            <a:avLst>
+              <a:gd name="adj" fmla="val 5000"/>
+            </a:avLst>
           </a:prstGeom>
           <a:solidFill>
-            <a:srgbClr val="0F172A"/>
+            <a:srgbClr val="120E20"/>
           </a:solidFill>
-          <a:ln w="15240">
+          <a:ln w="19050">
             <a:solidFill>
               <a:srgbClr val="F43F5E"/>
             </a:solidFill>
@@ -8658,7 +8738,7 @@
           </a:fontRef>
         </p:style>
         <p:txBody>
-          <a:bodyPr rtlCol="0" anchor="ctr" wrap="square" lIns="182880" rIns="182880" tIns="109728" bIns="91440"/>
+          <a:bodyPr rtlCol="0" anchor="ctr" wrap="square" lIns="219456" rIns="219456" tIns="109728" bIns="91440"/>
           <a:lstStyle/>
           <a:p>
             <a:pPr algn="ctr">
@@ -8699,16 +8779,18 @@
         </p:nvSpPr>
         <p:spPr>
           <a:xfrm>
-            <a:off x="6903720" y="4023360"/>
-            <a:ext cx="4556455" cy="1097280"/>
+            <a:off x="6293815" y="4041648"/>
+            <a:ext cx="5166360" cy="1078992"/>
           </a:xfrm>
           <a:prstGeom prst="roundRect">
-            <a:avLst/>
+            <a:avLst>
+              <a:gd name="adj" fmla="val 5000"/>
+            </a:avLst>
           </a:prstGeom>
           <a:solidFill>
-            <a:srgbClr val="0F172A"/>
+            <a:srgbClr val="120E20"/>
           </a:solidFill>
-          <a:ln w="15240">
+          <a:ln w="19050">
             <a:solidFill>
               <a:srgbClr val="A855F7"/>
             </a:solidFill>
@@ -8729,7 +8811,7 @@
           </a:fontRef>
         </p:style>
         <p:txBody>
-          <a:bodyPr rtlCol="0" anchor="ctr" wrap="square" lIns="182880" rIns="182880" tIns="109728" bIns="91440"/>
+          <a:bodyPr rtlCol="0" anchor="ctr" wrap="square" lIns="219456" rIns="219456" tIns="109728" bIns="91440"/>
           <a:lstStyle/>
           <a:p>
             <a:pPr algn="ctr">
@@ -8770,16 +8852,18 @@
         </p:nvSpPr>
         <p:spPr>
           <a:xfrm>
-            <a:off x="6903720" y="5266944"/>
-            <a:ext cx="4556455" cy="1097280"/>
+            <a:off x="6293815" y="5294376"/>
+            <a:ext cx="5166360" cy="1078992"/>
           </a:xfrm>
           <a:prstGeom prst="roundRect">
-            <a:avLst/>
+            <a:avLst>
+              <a:gd name="adj" fmla="val 5000"/>
+            </a:avLst>
           </a:prstGeom>
           <a:solidFill>
-            <a:srgbClr val="0F172A"/>
+            <a:srgbClr val="120E20"/>
           </a:solidFill>
-          <a:ln w="15240">
+          <a:ln w="19050">
             <a:solidFill>
               <a:srgbClr val="F43F5E"/>
             </a:solidFill>
@@ -8800,7 +8884,7 @@
           </a:fontRef>
         </p:style>
         <p:txBody>
-          <a:bodyPr rtlCol="0" anchor="ctr" wrap="square" lIns="182880" rIns="182880" tIns="109728" bIns="91440"/>
+          <a:bodyPr rtlCol="0" anchor="ctr" wrap="square" lIns="219456" rIns="219456" tIns="109728" bIns="91440"/>
           <a:lstStyle/>
           <a:p>
             <a:pPr algn="ctr">
@@ -8903,15 +8987,17 @@
         <p:spPr>
           <a:xfrm>
             <a:off x="731520" y="292608"/>
-            <a:ext cx="2121408" cy="292608"/>
+            <a:ext cx="2121408" cy="274320"/>
           </a:xfrm>
           <a:prstGeom prst="roundRect">
-            <a:avLst/>
+            <a:avLst>
+              <a:gd name="adj" fmla="val 50000"/>
+            </a:avLst>
           </a:prstGeom>
           <a:solidFill>
             <a:srgbClr val="120E20"/>
           </a:solidFill>
-          <a:ln w="15240">
+          <a:ln w="12700">
             <a:solidFill>
               <a:srgbClr val="A855F7"/>
             </a:solidFill>
@@ -8936,7 +9022,7 @@
           <a:lstStyle/>
           <a:p>
             <a:pPr algn="ctr">
-              <a:defRPr sz="950" b="1">
+              <a:defRPr sz="850" b="1">
                 <a:solidFill>
                   <a:srgbClr val="C084FC"/>
                 </a:solidFill>
@@ -9010,10 +9096,12 @@
         <p:spPr>
           <a:xfrm>
             <a:off x="731520" y="1536192"/>
-            <a:ext cx="5852160" cy="4846320"/>
+            <a:ext cx="5166360" cy="4846320"/>
           </a:xfrm>
           <a:prstGeom prst="roundRect">
-            <a:avLst/>
+            <a:avLst>
+              <a:gd name="adj" fmla="val 5000"/>
+            </a:avLst>
           </a:prstGeom>
           <a:solidFill>
             <a:srgbClr val="120E20"/>
@@ -9039,7 +9127,7 @@
           </a:fontRef>
         </p:style>
         <p:txBody>
-          <a:bodyPr rtlCol="0" anchor="ctr"/>
+          <a:bodyPr rtlCol="0" anchor="ctr" wrap="square" lIns="256032" rIns="256032" tIns="219456" bIns="182880"/>
           <a:lstStyle/>
           <a:p>
             <a:pPr algn="ctr"/>
@@ -9054,8 +9142,8 @@
         </p:nvSpPr>
         <p:spPr>
           <a:xfrm>
-            <a:off x="914400" y="1600200"/>
-            <a:ext cx="5486400" cy="292608"/>
+            <a:off x="914400" y="1645920"/>
+            <a:ext cx="4800600" cy="310896"/>
           </a:xfrm>
           <a:prstGeom prst="rect">
             <a:avLst/>
@@ -9090,16 +9178,18 @@
         </p:nvSpPr>
         <p:spPr>
           <a:xfrm>
-            <a:off x="960120" y="1956816"/>
-            <a:ext cx="5394960" cy="438912"/>
+            <a:off x="914400" y="2011680"/>
+            <a:ext cx="4800600" cy="438912"/>
           </a:xfrm>
           <a:prstGeom prst="roundRect">
-            <a:avLst/>
+            <a:avLst>
+              <a:gd name="adj" fmla="val 5000"/>
+            </a:avLst>
           </a:prstGeom>
           <a:solidFill>
             <a:srgbClr val="1E1B4B"/>
           </a:solidFill>
-          <a:ln w="15240">
+          <a:ln w="12700">
             <a:solidFill>
               <a:srgbClr val="818CF8"/>
             </a:solidFill>
@@ -9140,7 +9230,7 @@
               <a:spcBef>
                 <a:spcPts val="200"/>
               </a:spcBef>
-              <a:defRPr sz="800">
+              <a:defRPr b="0" sz="800">
                 <a:solidFill>
                   <a:srgbClr val="94A3B8"/>
                 </a:solidFill>
@@ -9161,7 +9251,7 @@
         </p:nvSpPr>
         <p:spPr>
           <a:xfrm>
-            <a:off x="3474720" y="2414016"/>
+            <a:off x="3131820" y="2468880"/>
             <a:ext cx="365760" cy="219456"/>
           </a:xfrm>
           <a:prstGeom prst="rect">
@@ -9197,16 +9287,18 @@
         </p:nvSpPr>
         <p:spPr>
           <a:xfrm>
-            <a:off x="960120" y="2651760"/>
-            <a:ext cx="5394960" cy="438912"/>
+            <a:off x="914400" y="2706624"/>
+            <a:ext cx="4800600" cy="438912"/>
           </a:xfrm>
           <a:prstGeom prst="roundRect">
-            <a:avLst/>
+            <a:avLst>
+              <a:gd name="adj" fmla="val 5000"/>
+            </a:avLst>
           </a:prstGeom>
           <a:solidFill>
             <a:srgbClr val="0F172A"/>
           </a:solidFill>
-          <a:ln w="15240">
+          <a:ln w="12700">
             <a:solidFill>
               <a:srgbClr val="C084FC"/>
             </a:solidFill>
@@ -9247,7 +9339,7 @@
               <a:spcBef>
                 <a:spcPts val="200"/>
               </a:spcBef>
-              <a:defRPr sz="800">
+              <a:defRPr b="0" sz="800">
                 <a:solidFill>
                   <a:srgbClr val="94A3B8"/>
                 </a:solidFill>
@@ -9268,7 +9360,7 @@
         </p:nvSpPr>
         <p:spPr>
           <a:xfrm>
-            <a:off x="3474720" y="3108960"/>
+            <a:off x="3131820" y="3163824"/>
             <a:ext cx="365760" cy="219456"/>
           </a:xfrm>
           <a:prstGeom prst="rect">
@@ -9304,16 +9396,18 @@
         </p:nvSpPr>
         <p:spPr>
           <a:xfrm>
-            <a:off x="960120" y="3346704"/>
-            <a:ext cx="5394960" cy="438912"/>
+            <a:off x="914400" y="3401568"/>
+            <a:ext cx="4800600" cy="438912"/>
           </a:xfrm>
           <a:prstGeom prst="roundRect">
-            <a:avLst/>
+            <a:avLst>
+              <a:gd name="adj" fmla="val 5000"/>
+            </a:avLst>
           </a:prstGeom>
           <a:solidFill>
             <a:srgbClr val="0F172A"/>
           </a:solidFill>
-          <a:ln w="15240">
+          <a:ln w="12700">
             <a:solidFill>
               <a:srgbClr val="38BDF8"/>
             </a:solidFill>
@@ -9354,7 +9448,7 @@
               <a:spcBef>
                 <a:spcPts val="200"/>
               </a:spcBef>
-              <a:defRPr sz="800">
+              <a:defRPr b="0" sz="800">
                 <a:solidFill>
                   <a:srgbClr val="94A3B8"/>
                 </a:solidFill>
@@ -9375,7 +9469,7 @@
         </p:nvSpPr>
         <p:spPr>
           <a:xfrm>
-            <a:off x="3474720" y="3803904"/>
+            <a:off x="3131820" y="3858768"/>
             <a:ext cx="365760" cy="219456"/>
           </a:xfrm>
           <a:prstGeom prst="rect">
@@ -9411,16 +9505,18 @@
         </p:nvSpPr>
         <p:spPr>
           <a:xfrm>
-            <a:off x="960120" y="4041648"/>
-            <a:ext cx="5394960" cy="438912"/>
+            <a:off x="914400" y="4096512"/>
+            <a:ext cx="4800600" cy="438912"/>
           </a:xfrm>
           <a:prstGeom prst="roundRect">
-            <a:avLst/>
+            <a:avLst>
+              <a:gd name="adj" fmla="val 5000"/>
+            </a:avLst>
           </a:prstGeom>
           <a:solidFill>
             <a:srgbClr val="0F172A"/>
           </a:solidFill>
-          <a:ln w="15240">
+          <a:ln w="12700">
             <a:solidFill>
               <a:srgbClr val="C084FC"/>
             </a:solidFill>
@@ -9461,7 +9557,7 @@
               <a:spcBef>
                 <a:spcPts val="200"/>
               </a:spcBef>
-              <a:defRPr sz="800">
+              <a:defRPr b="0" sz="800">
                 <a:solidFill>
                   <a:srgbClr val="94A3B8"/>
                 </a:solidFill>
@@ -9482,7 +9578,7 @@
         </p:nvSpPr>
         <p:spPr>
           <a:xfrm>
-            <a:off x="3474720" y="4498848"/>
+            <a:off x="3131820" y="4553712"/>
             <a:ext cx="365760" cy="219456"/>
           </a:xfrm>
           <a:prstGeom prst="rect">
@@ -9518,16 +9614,18 @@
         </p:nvSpPr>
         <p:spPr>
           <a:xfrm>
-            <a:off x="960120" y="4736592"/>
-            <a:ext cx="5394960" cy="438912"/>
+            <a:off x="914400" y="4791456"/>
+            <a:ext cx="4800600" cy="438912"/>
           </a:xfrm>
           <a:prstGeom prst="roundRect">
-            <a:avLst/>
+            <a:avLst>
+              <a:gd name="adj" fmla="val 5000"/>
+            </a:avLst>
           </a:prstGeom>
           <a:solidFill>
             <a:srgbClr val="064E3B"/>
           </a:solidFill>
-          <a:ln w="15240">
+          <a:ln w="12700">
             <a:solidFill>
               <a:srgbClr val="22C55E"/>
             </a:solidFill>
@@ -9568,7 +9666,7 @@
               <a:spcBef>
                 <a:spcPts val="200"/>
               </a:spcBef>
-              <a:defRPr sz="800">
+              <a:defRPr b="0" sz="800">
                 <a:solidFill>
                   <a:srgbClr val="94A3B8"/>
                 </a:solidFill>
@@ -9589,7 +9687,7 @@
         </p:nvSpPr>
         <p:spPr>
           <a:xfrm>
-            <a:off x="3474720" y="5193792"/>
+            <a:off x="3131820" y="5248656"/>
             <a:ext cx="365760" cy="219456"/>
           </a:xfrm>
           <a:prstGeom prst="rect">
@@ -9625,16 +9723,18 @@
         </p:nvSpPr>
         <p:spPr>
           <a:xfrm>
-            <a:off x="960120" y="5431536"/>
-            <a:ext cx="5394960" cy="438912"/>
+            <a:off x="914400" y="5486400"/>
+            <a:ext cx="4800600" cy="438912"/>
           </a:xfrm>
           <a:prstGeom prst="roundRect">
-            <a:avLst/>
+            <a:avLst>
+              <a:gd name="adj" fmla="val 5000"/>
+            </a:avLst>
           </a:prstGeom>
           <a:solidFill>
             <a:srgbClr val="2E1065"/>
           </a:solidFill>
-          <a:ln w="15240">
+          <a:ln w="12700">
             <a:solidFill>
               <a:srgbClr val="C084FC"/>
             </a:solidFill>
@@ -9675,7 +9775,7 @@
               <a:spcBef>
                 <a:spcPts val="200"/>
               </a:spcBef>
-              <a:defRPr sz="800">
+              <a:defRPr b="0" sz="800">
                 <a:solidFill>
                   <a:srgbClr val="94A3B8"/>
                 </a:solidFill>
@@ -9696,16 +9796,18 @@
         </p:nvSpPr>
         <p:spPr>
           <a:xfrm>
-            <a:off x="6903720" y="1536192"/>
-            <a:ext cx="4556455" cy="1097280"/>
+            <a:off x="6293815" y="1536192"/>
+            <a:ext cx="5166360" cy="1078992"/>
           </a:xfrm>
           <a:prstGeom prst="roundRect">
-            <a:avLst/>
+            <a:avLst>
+              <a:gd name="adj" fmla="val 5000"/>
+            </a:avLst>
           </a:prstGeom>
           <a:solidFill>
-            <a:srgbClr val="0F172A"/>
+            <a:srgbClr val="120E20"/>
           </a:solidFill>
-          <a:ln w="15240">
+          <a:ln w="19050">
             <a:solidFill>
               <a:srgbClr val="818CF8"/>
             </a:solidFill>
@@ -9726,7 +9828,7 @@
           </a:fontRef>
         </p:style>
         <p:txBody>
-          <a:bodyPr rtlCol="0" anchor="ctr" wrap="square" lIns="182880" rIns="182880" tIns="109728" bIns="91440"/>
+          <a:bodyPr rtlCol="0" anchor="ctr" wrap="square" lIns="219456" rIns="219456" tIns="109728" bIns="91440"/>
           <a:lstStyle/>
           <a:p>
             <a:pPr algn="ctr">
@@ -9767,16 +9869,18 @@
         </p:nvSpPr>
         <p:spPr>
           <a:xfrm>
-            <a:off x="6903720" y="2779776"/>
-            <a:ext cx="4556455" cy="1097280"/>
+            <a:off x="6293815" y="2788920"/>
+            <a:ext cx="5166360" cy="1078992"/>
           </a:xfrm>
           <a:prstGeom prst="roundRect">
-            <a:avLst/>
+            <a:avLst>
+              <a:gd name="adj" fmla="val 5000"/>
+            </a:avLst>
           </a:prstGeom>
           <a:solidFill>
-            <a:srgbClr val="0F172A"/>
+            <a:srgbClr val="120E20"/>
           </a:solidFill>
-          <a:ln w="15240">
+          <a:ln w="19050">
             <a:solidFill>
               <a:srgbClr val="C084FC"/>
             </a:solidFill>
@@ -9797,7 +9901,7 @@
           </a:fontRef>
         </p:style>
         <p:txBody>
-          <a:bodyPr rtlCol="0" anchor="ctr" wrap="square" lIns="182880" rIns="182880" tIns="109728" bIns="91440"/>
+          <a:bodyPr rtlCol="0" anchor="ctr" wrap="square" lIns="219456" rIns="219456" tIns="109728" bIns="91440"/>
           <a:lstStyle/>
           <a:p>
             <a:pPr algn="ctr">
@@ -9838,16 +9942,18 @@
         </p:nvSpPr>
         <p:spPr>
           <a:xfrm>
-            <a:off x="6903720" y="4023360"/>
-            <a:ext cx="4556455" cy="1097280"/>
+            <a:off x="6293815" y="4041648"/>
+            <a:ext cx="5166360" cy="1078992"/>
           </a:xfrm>
           <a:prstGeom prst="roundRect">
-            <a:avLst/>
+            <a:avLst>
+              <a:gd name="adj" fmla="val 5000"/>
+            </a:avLst>
           </a:prstGeom>
           <a:solidFill>
-            <a:srgbClr val="0F172A"/>
+            <a:srgbClr val="120E20"/>
           </a:solidFill>
-          <a:ln w="15240">
+          <a:ln w="19050">
             <a:solidFill>
               <a:srgbClr val="22C55E"/>
             </a:solidFill>
@@ -9868,7 +9974,7 @@
           </a:fontRef>
         </p:style>
         <p:txBody>
-          <a:bodyPr rtlCol="0" anchor="ctr" wrap="square" lIns="182880" rIns="182880" tIns="109728" bIns="91440"/>
+          <a:bodyPr rtlCol="0" anchor="ctr" wrap="square" lIns="219456" rIns="219456" tIns="109728" bIns="91440"/>
           <a:lstStyle/>
           <a:p>
             <a:pPr algn="ctr">
@@ -9909,16 +10015,18 @@
         </p:nvSpPr>
         <p:spPr>
           <a:xfrm>
-            <a:off x="6903720" y="5266944"/>
-            <a:ext cx="4556455" cy="1097280"/>
+            <a:off x="6293815" y="5294376"/>
+            <a:ext cx="5166360" cy="1078992"/>
           </a:xfrm>
           <a:prstGeom prst="roundRect">
-            <a:avLst/>
+            <a:avLst>
+              <a:gd name="adj" fmla="val 5000"/>
+            </a:avLst>
           </a:prstGeom>
           <a:solidFill>
-            <a:srgbClr val="0F172A"/>
+            <a:srgbClr val="120E20"/>
           </a:solidFill>
-          <a:ln w="15240">
+          <a:ln w="19050">
             <a:solidFill>
               <a:srgbClr val="38BDF8"/>
             </a:solidFill>
@@ -9939,7 +10047,7 @@
           </a:fontRef>
         </p:style>
         <p:txBody>
-          <a:bodyPr rtlCol="0" anchor="ctr" wrap="square" lIns="182880" rIns="182880" tIns="109728" bIns="91440"/>
+          <a:bodyPr rtlCol="0" anchor="ctr" wrap="square" lIns="219456" rIns="219456" tIns="109728" bIns="91440"/>
           <a:lstStyle/>
           <a:p>
             <a:pPr algn="ctr">
@@ -10042,15 +10150,17 @@
         <p:spPr>
           <a:xfrm>
             <a:off x="731520" y="292608"/>
-            <a:ext cx="2523744" cy="292608"/>
+            <a:ext cx="2523744" cy="274320"/>
           </a:xfrm>
           <a:prstGeom prst="roundRect">
-            <a:avLst/>
+            <a:avLst>
+              <a:gd name="adj" fmla="val 50000"/>
+            </a:avLst>
           </a:prstGeom>
           <a:solidFill>
             <a:srgbClr val="120E20"/>
           </a:solidFill>
-          <a:ln w="15240">
+          <a:ln w="12700">
             <a:solidFill>
               <a:srgbClr val="A855F7"/>
             </a:solidFill>
@@ -10075,7 +10185,7 @@
           <a:lstStyle/>
           <a:p>
             <a:pPr algn="ctr">
-              <a:defRPr sz="950" b="1">
+              <a:defRPr sz="850" b="1">
                 <a:solidFill>
                   <a:srgbClr val="C084FC"/>
                 </a:solidFill>
@@ -10152,7 +10262,9 @@
             <a:ext cx="5166360" cy="4846320"/>
           </a:xfrm>
           <a:prstGeom prst="roundRect">
-            <a:avLst/>
+            <a:avLst>
+              <a:gd name="adj" fmla="val 5000"/>
+            </a:avLst>
           </a:prstGeom>
           <a:solidFill>
             <a:srgbClr val="120E20"/>
@@ -10196,9 +10308,9 @@
           <a:p>
             <a:pPr>
               <a:spcBef>
-                <a:spcPts val="1100"/>
-              </a:spcBef>
-              <a:defRPr b="1" sz="1200">
+                <a:spcPts val="800"/>
+              </a:spcBef>
+              <a:defRPr b="1" sz="1100">
                 <a:solidFill>
                   <a:srgbClr val="F8FAFC"/>
                 </a:solidFill>
@@ -10206,7 +10318,7 @@
               </a:defRPr>
             </a:pPr>
             <a:r>
-              <a:t>• Kubernetes Cluster:</a:t>
+              <a:t>• Kubernetes Cluster &amp; Helm Charts:</a:t>
             </a:r>
           </a:p>
           <a:p>
@@ -10214,7 +10326,7 @@
               <a:spcBef>
                 <a:spcPts val="200"/>
               </a:spcBef>
-              <a:defRPr sz="1050">
+              <a:defRPr sz="980">
                 <a:solidFill>
                   <a:srgbClr val="94A3B8"/>
                 </a:solidFill>
@@ -10222,15 +10334,15 @@
               </a:defRPr>
             </a:pPr>
             <a:r>
-              <a:t>Triển khai điều phối bằng Helm Charts chính thức của Airflow / Dagster.</a:t>
+              <a:t>Triển khai điều phối bằng Helm Charts chính thức của Airflow / Dagster trên hạ tầng K8s.</a:t>
             </a:r>
           </a:p>
           <a:p>
             <a:pPr>
               <a:spcBef>
-                <a:spcPts val="1100"/>
-              </a:spcBef>
-              <a:defRPr b="1" sz="1200">
+                <a:spcPts val="800"/>
+              </a:spcBef>
+              <a:defRPr b="1" sz="1100">
                 <a:solidFill>
                   <a:srgbClr val="F8FAFC"/>
                 </a:solidFill>
@@ -10246,7 +10358,7 @@
               <a:spcBef>
                 <a:spcPts val="200"/>
               </a:spcBef>
-              <a:defRPr sz="1050">
+              <a:defRPr sz="980">
                 <a:solidFill>
                   <a:srgbClr val="94A3B8"/>
                 </a:solidFill>
@@ -10254,15 +10366,15 @@
               </a:defRPr>
             </a:pPr>
             <a:r>
-              <a:t>Thay thế hoàn hảo AWS S3 để lưu trữ file PDF hóa đơn và artifacts.</a:t>
+              <a:t>Thay thế hoàn hảo AWS S3 để lưu trữ file PDF hóa đơn và artifacts, I/O Manager tự động đẩy/kéo.</a:t>
             </a:r>
           </a:p>
           <a:p>
             <a:pPr>
               <a:spcBef>
-                <a:spcPts val="1100"/>
-              </a:spcBef>
-              <a:defRPr b="1" sz="1200">
+                <a:spcPts val="800"/>
+              </a:spcBef>
+              <a:defRPr b="1" sz="1100">
                 <a:solidFill>
                   <a:srgbClr val="F8FAFC"/>
                 </a:solidFill>
@@ -10270,7 +10382,7 @@
               </a:defRPr>
             </a:pPr>
             <a:r>
-              <a:t>• PostgreSQL HA:</a:t>
+              <a:t>• PostgreSQL HA Cụm Replica:</a:t>
             </a:r>
           </a:p>
           <a:p>
@@ -10278,7 +10390,7 @@
               <a:spcBef>
                 <a:spcPts val="200"/>
               </a:spcBef>
-              <a:defRPr sz="1050">
+              <a:defRPr sz="980">
                 <a:solidFill>
                   <a:srgbClr val="94A3B8"/>
                 </a:solidFill>
@@ -10286,15 +10398,15 @@
               </a:defRPr>
             </a:pPr>
             <a:r>
-              <a:t>Lưu trữ metadata của hệ thống với cụm replica độ tin cậy cao.</a:t>
+              <a:t>Lưu trữ metadata hệ thống với cụm replica tin cậy cao (Dagster chỉ lưu event log nhẹ).</a:t>
             </a:r>
           </a:p>
           <a:p>
             <a:pPr>
               <a:spcBef>
-                <a:spcPts val="1100"/>
-              </a:spcBef>
-              <a:defRPr b="1" sz="1200">
+                <a:spcPts val="800"/>
+              </a:spcBef>
+              <a:defRPr b="1" sz="1100">
                 <a:solidFill>
                   <a:srgbClr val="F8FAFC"/>
                 </a:solidFill>
@@ -10302,7 +10414,7 @@
               </a:defRPr>
             </a:pPr>
             <a:r>
-              <a:t>• Vault &amp; Keycloak:</a:t>
+              <a:t>• Vault, Keycloak &amp; Bảo Mật:</a:t>
             </a:r>
           </a:p>
           <a:p>
@@ -10310,7 +10422,7 @@
               <a:spcBef>
                 <a:spcPts val="200"/>
               </a:spcBef>
-              <a:defRPr sz="1050">
+              <a:defRPr sz="980">
                 <a:solidFill>
                   <a:srgbClr val="94A3B8"/>
                 </a:solidFill>
@@ -10318,7 +10430,39 @@
               </a:defRPr>
             </a:pPr>
             <a:r>
-              <a:t>Quản lý secret và xác thực bảo mật tập trung cho toàn bộ dịch vụ.</a:t>
+              <a:t>Quản lý secret và xác thực bảo mật tập trung cho toàn bộ dịch vụ On-Premise.</a:t>
+            </a:r>
+          </a:p>
+          <a:p>
+            <a:pPr>
+              <a:spcBef>
+                <a:spcPts val="800"/>
+              </a:spcBef>
+              <a:defRPr b="1" sz="1100">
+                <a:solidFill>
+                  <a:srgbClr val="F8FAFC"/>
+                </a:solidFill>
+                <a:latin typeface="Arial"/>
+              </a:defRPr>
+            </a:pPr>
+            <a:r>
+              <a:t>• Code Location Pods Độc Lập:</a:t>
+            </a:r>
+          </a:p>
+          <a:p>
+            <a:pPr>
+              <a:spcBef>
+                <a:spcPts val="200"/>
+              </a:spcBef>
+              <a:defRPr sz="980">
+                <a:solidFill>
+                  <a:srgbClr val="94A3B8"/>
+                </a:solidFill>
+                <a:latin typeface="Arial"/>
+              </a:defRPr>
+            </a:pPr>
+            <a:r>
+              <a:t>Dagster đóng gói Docker riêng, gọi gRPC cách ly mã nguồn, tự do dùng đa phiên bản Python.</a:t>
             </a:r>
           </a:p>
         </p:txBody>
@@ -10335,14 +10479,16 @@
             <a:ext cx="5166360" cy="4846320"/>
           </a:xfrm>
           <a:prstGeom prst="roundRect">
-            <a:avLst/>
+            <a:avLst>
+              <a:gd name="adj" fmla="val 5000"/>
+            </a:avLst>
           </a:prstGeom>
           <a:solidFill>
             <a:srgbClr val="120E20"/>
           </a:solidFill>
           <a:ln w="19050">
             <a:solidFill>
-              <a:srgbClr val="22C55E"/>
+              <a:srgbClr val="C084FC"/>
             </a:solidFill>
           </a:ln>
         </p:spPr>
@@ -10367,7 +10513,7 @@
             <a:pPr algn="ctr">
               <a:defRPr sz="1650" b="1">
                 <a:solidFill>
-                  <a:srgbClr val="22C55E"/>
+                  <a:srgbClr val="C084FC"/>
                 </a:solidFill>
                 <a:latin typeface="Arial"/>
               </a:defRPr>
@@ -10379,9 +10525,9 @@
           <a:p>
             <a:pPr>
               <a:spcBef>
-                <a:spcPts val="1100"/>
-              </a:spcBef>
-              <a:defRPr b="1" sz="1200">
+                <a:spcPts val="800"/>
+              </a:spcBef>
+              <a:defRPr b="1" sz="1100">
                 <a:solidFill>
                   <a:srgbClr val="F8FAFC"/>
                 </a:solidFill>
@@ -10389,7 +10535,7 @@
               </a:defRPr>
             </a:pPr>
             <a:r>
-              <a:t>• Airflow Unit Test (Phức tạp, 5-15 giây):</a:t>
+              <a:t>• Airflow Unit Test (Phức tạp, 3-5 phút):</a:t>
             </a:r>
           </a:p>
           <a:p>
@@ -10397,7 +10543,7 @@
               <a:spcBef>
                 <a:spcPts val="200"/>
               </a:spcBef>
-              <a:defRPr sz="1050">
+              <a:defRPr sz="980">
                 <a:solidFill>
                   <a:srgbClr val="94A3B8"/>
                 </a:solidFill>
@@ -10405,15 +10551,15 @@
               </a:defRPr>
             </a:pPr>
             <a:r>
-              <a:t>Cần khởi tạo SQLite database giả lập, mock context và task instance. Chạy chậm trong CI.</a:t>
+              <a:t>Cần khởi tạo SQLite/Postgres giả lập, mock context và task instance. Chạy chậm trong CI/CD.</a:t>
             </a:r>
           </a:p>
           <a:p>
             <a:pPr>
               <a:spcBef>
-                <a:spcPts val="1100"/>
-              </a:spcBef>
-              <a:defRPr b="1" sz="1200">
+                <a:spcPts val="800"/>
+              </a:spcBef>
+              <a:defRPr b="1" sz="1100">
                 <a:solidFill>
                   <a:srgbClr val="F8FAFC"/>
                 </a:solidFill>
@@ -10421,7 +10567,7 @@
               </a:defRPr>
             </a:pPr>
             <a:r>
-              <a:t>• Dagster In-Memory Test (Cực nhanh, ~0.12 giây):</a:t>
+              <a:t>• Dagster In-Memory Test (Siêu tốc, 0.12 giây):</a:t>
             </a:r>
           </a:p>
           <a:p>
@@ -10429,7 +10575,7 @@
               <a:spcBef>
                 <a:spcPts val="200"/>
               </a:spcBef>
-              <a:defRPr sz="1050">
+              <a:defRPr sz="980">
                 <a:solidFill>
                   <a:srgbClr val="94A3B8"/>
                 </a:solidFill>
@@ -10437,15 +10583,15 @@
               </a:defRPr>
             </a:pPr>
             <a:r>
-              <a:t>Hỗ trợ materialize([asset_name]) trực tiếp trong RAM, không cần database hay server. Tích hợp trơn tru vào Pytest.</a:t>
+              <a:t>Hỗ trợ materialize([asset_name]) trực tiếp trong RAM, không cần database hay server.</a:t>
             </a:r>
           </a:p>
           <a:p>
             <a:pPr>
               <a:spcBef>
-                <a:spcPts val="1100"/>
-              </a:spcBef>
-              <a:defRPr b="1" sz="1200">
+                <a:spcPts val="800"/>
+              </a:spcBef>
+              <a:defRPr b="1" sz="1100">
                 <a:solidFill>
                   <a:srgbClr val="F8FAFC"/>
                 </a:solidFill>
@@ -10453,7 +10599,7 @@
               </a:defRPr>
             </a:pPr>
             <a:r>
-              <a:t>• Tự tin Refactor:</a:t>
+              <a:t>• Tự Động Hóa Kiểm Thử CI/CD:</a:t>
             </a:r>
           </a:p>
           <a:p>
@@ -10461,7 +10607,7 @@
               <a:spcBef>
                 <a:spcPts val="200"/>
               </a:spcBef>
-              <a:defRPr sz="1050">
+              <a:defRPr sz="980">
                 <a:solidFill>
                   <a:srgbClr val="94A3B8"/>
                 </a:solidFill>
@@ -10469,15 +10615,15 @@
               </a:defRPr>
             </a:pPr>
             <a:r>
-              <a:t>Kỹ sư tự do thay đổi logic xử lý hóa đơn và kiểm tra ngay lập tức tại máy cá nhân.</a:t>
+              <a:t>Tích hợp mượt mà pytest vào GitLab CI / GitHub Actions trên từng PR trước khi merge.</a:t>
             </a:r>
           </a:p>
           <a:p>
             <a:pPr>
               <a:spcBef>
-                <a:spcPts val="1100"/>
-              </a:spcBef>
-              <a:defRPr b="1" sz="1200">
+                <a:spcPts val="800"/>
+              </a:spcBef>
+              <a:defRPr b="1" sz="1100">
                 <a:solidFill>
                   <a:srgbClr val="F8FAFC"/>
                 </a:solidFill>
@@ -10485,7 +10631,7 @@
               </a:defRPr>
             </a:pPr>
             <a:r>
-              <a:t>• Tối ưu chu kỳ phản hồi:</a:t>
+              <a:t>• Bảo Vệ Chất Lượng Dữ Liệu:</a:t>
             </a:r>
           </a:p>
           <a:p>
@@ -10493,7 +10639,7 @@
               <a:spcBef>
                 <a:spcPts val="200"/>
               </a:spcBef>
-              <a:defRPr sz="1050">
+              <a:defRPr sz="980">
                 <a:solidFill>
                   <a:srgbClr val="94A3B8"/>
                 </a:solidFill>
@@ -10501,7 +10647,39 @@
               </a:defRPr>
             </a:pPr>
             <a:r>
-              <a:t>Rút ngắn thời gian phát hiện lỗi từ hàng phút xuống chỉ vài trăm mili-giây.</a:t>
+              <a:t>@asset_check(blocking=True) ngắt luồng tại chỗ trong 0.02s nếu hóa đơn vượt ngân sách 100M.</a:t>
+            </a:r>
+          </a:p>
+          <a:p>
+            <a:pPr>
+              <a:spcBef>
+                <a:spcPts val="800"/>
+              </a:spcBef>
+              <a:defRPr b="1" sz="1100">
+                <a:solidFill>
+                  <a:srgbClr val="F8FAFC"/>
+                </a:solidFill>
+                <a:latin typeface="Arial"/>
+              </a:defRPr>
+            </a:pPr>
+            <a:r>
+              <a:t>• Tự Tin Refactor &amp; DevX Vượt Trội:</a:t>
+            </a:r>
+          </a:p>
+          <a:p>
+            <a:pPr>
+              <a:spcBef>
+                <a:spcPts val="200"/>
+              </a:spcBef>
+              <a:defRPr sz="980">
+                <a:solidFill>
+                  <a:srgbClr val="94A3B8"/>
+                </a:solidFill>
+                <a:latin typeface="Arial"/>
+              </a:defRPr>
+            </a:pPr>
+            <a:r>
+              <a:t>Kỹ sư tự do thay đổi logic hóa đơn và kiểm tra ngay tức thì tại máy cá nhân.</a:t>
             </a:r>
           </a:p>
         </p:txBody>
@@ -10576,15 +10754,17 @@
         <p:spPr>
           <a:xfrm>
             <a:off x="731520" y="292608"/>
-            <a:ext cx="2221992" cy="292608"/>
+            <a:ext cx="2221992" cy="274320"/>
           </a:xfrm>
           <a:prstGeom prst="roundRect">
-            <a:avLst/>
+            <a:avLst>
+              <a:gd name="adj" fmla="val 50000"/>
+            </a:avLst>
           </a:prstGeom>
           <a:solidFill>
             <a:srgbClr val="120E20"/>
           </a:solidFill>
-          <a:ln w="15240">
+          <a:ln w="12700">
             <a:solidFill>
               <a:srgbClr val="A855F7"/>
             </a:solidFill>
@@ -10609,7 +10789,7 @@
           <a:lstStyle/>
           <a:p>
             <a:pPr algn="ctr">
-              <a:defRPr sz="950" b="1">
+              <a:defRPr sz="850" b="1">
                 <a:solidFill>
                   <a:srgbClr val="C084FC"/>
                 </a:solidFill>
@@ -10683,8 +10863,8 @@
           <p:nvPr/>
         </p:nvGraphicFramePr>
         <p:xfrm>
-          <a:off x="731520" y="1572768"/>
-          <a:ext cx="10728655" cy="4754880"/>
+          <a:off x="731520" y="1536192"/>
+          <a:ext cx="10728655" cy="4846320"/>
         </p:xfrm>
         <a:graphic>
           <a:graphicData uri="http://schemas.openxmlformats.org/drawingml/2006/table">
@@ -10698,7 +10878,7 @@
                 <a:gridCol w="3886200"/>
                 <a:gridCol w="853135"/>
               </a:tblGrid>
-              <a:tr h="594360">
+              <a:tr h="605790">
                 <a:tc>
                   <a:txBody>
                     <a:bodyPr/>
@@ -10796,7 +10976,7 @@
                   </a:tcPr>
                 </a:tc>
               </a:tr>
-              <a:tr h="594360">
+              <a:tr h="605790">
                 <a:tc>
                   <a:txBody>
                     <a:bodyPr/>
@@ -10894,7 +11074,7 @@
                   </a:tcPr>
                 </a:tc>
               </a:tr>
-              <a:tr h="594360">
+              <a:tr h="605790">
                 <a:tc>
                   <a:txBody>
                     <a:bodyPr/>
@@ -10992,7 +11172,7 @@
                   </a:tcPr>
                 </a:tc>
               </a:tr>
-              <a:tr h="594360">
+              <a:tr h="605790">
                 <a:tc>
                   <a:txBody>
                     <a:bodyPr/>
@@ -11090,7 +11270,7 @@
                   </a:tcPr>
                 </a:tc>
               </a:tr>
-              <a:tr h="594360">
+              <a:tr h="605790">
                 <a:tc>
                   <a:txBody>
                     <a:bodyPr/>
@@ -11188,7 +11368,7 @@
                   </a:tcPr>
                 </a:tc>
               </a:tr>
-              <a:tr h="594360">
+              <a:tr h="605790">
                 <a:tc>
                   <a:txBody>
                     <a:bodyPr/>
@@ -11286,7 +11466,7 @@
                   </a:tcPr>
                 </a:tc>
               </a:tr>
-              <a:tr h="594360">
+              <a:tr h="605790">
                 <a:tc>
                   <a:txBody>
                     <a:bodyPr/>
@@ -11384,7 +11564,7 @@
                   </a:tcPr>
                 </a:tc>
               </a:tr>
-              <a:tr h="594360">
+              <a:tr h="605790">
                 <a:tc>
                   <a:txBody>
                     <a:bodyPr/>
@@ -11556,15 +11736,17 @@
         <p:spPr>
           <a:xfrm>
             <a:off x="731520" y="292608"/>
-            <a:ext cx="2121408" cy="292608"/>
+            <a:ext cx="2121408" cy="274320"/>
           </a:xfrm>
           <a:prstGeom prst="roundRect">
-            <a:avLst/>
+            <a:avLst>
+              <a:gd name="adj" fmla="val 50000"/>
+            </a:avLst>
           </a:prstGeom>
           <a:solidFill>
             <a:srgbClr val="120E20"/>
           </a:solidFill>
-          <a:ln w="15240">
+          <a:ln w="12700">
             <a:solidFill>
               <a:srgbClr val="A855F7"/>
             </a:solidFill>
@@ -11589,7 +11771,7 @@
           <a:lstStyle/>
           <a:p>
             <a:pPr algn="ctr">
-              <a:defRPr sz="950" b="1">
+              <a:defRPr sz="850" b="1">
                 <a:solidFill>
                   <a:srgbClr val="C084FC"/>
                 </a:solidFill>
@@ -11666,7 +11848,9 @@
             <a:ext cx="5166360" cy="4846320"/>
           </a:xfrm>
           <a:prstGeom prst="roundRect">
-            <a:avLst/>
+            <a:avLst>
+              <a:gd name="adj" fmla="val 5000"/>
+            </a:avLst>
           </a:prstGeom>
           <a:solidFill>
             <a:srgbClr val="120E20"/>
@@ -11881,7 +12065,9 @@
             <a:ext cx="5166360" cy="4846320"/>
           </a:xfrm>
           <a:prstGeom prst="roundRect">
-            <a:avLst/>
+            <a:avLst>
+              <a:gd name="adj" fmla="val 5000"/>
+            </a:avLst>
           </a:prstGeom>
           <a:solidFill>
             <a:srgbClr val="120E20"/>
